--- a/Kruskalův algoritmus.pptx
+++ b/Kruskalův algoritmus.pptx
@@ -6,9 +6,15 @@
   </p:sldMasterIdLst>
   <p:sldIdLst>
     <p:sldId id="256" r:id="rId2"/>
-    <p:sldId id="257" r:id="rId3"/>
-    <p:sldId id="258" r:id="rId4"/>
-    <p:sldId id="259" r:id="rId5"/>
+    <p:sldId id="259" r:id="rId3"/>
+    <p:sldId id="257" r:id="rId4"/>
+    <p:sldId id="258" r:id="rId5"/>
+    <p:sldId id="260" r:id="rId6"/>
+    <p:sldId id="261" r:id="rId7"/>
+    <p:sldId id="262" r:id="rId8"/>
+    <p:sldId id="263" r:id="rId9"/>
+    <p:sldId id="264" r:id="rId10"/>
+    <p:sldId id="265" r:id="rId11"/>
   </p:sldIdLst>
   <p:sldSz cx="12192000" cy="6858000"/>
   <p:notesSz cx="6858000" cy="9144000"/>
@@ -107,6 +113,11 @@
       </a:defRPr>
     </a:lvl9pPr>
   </p:defaultTextStyle>
+  <p:extLst>
+    <p:ext uri="{EFAFB233-063F-42B5-8137-9DF3F51BA10A}">
+      <p15:sldGuideLst xmlns:p15="http://schemas.microsoft.com/office/powerpoint/2012/main"/>
+    </p:ext>
+  </p:extLst>
 </p:presentation>
 </file>
 
@@ -257,7 +268,7 @@
           <a:p>
             <a:fld id="{BAB1D827-8AA8-4934-AFD2-771498CF3B22}" type="datetimeFigureOut">
               <a:rPr lang="cs-CZ" smtClean="0"/>
-              <a:t>15.01.2025</a:t>
+              <a:t>26.01.2025</a:t>
             </a:fld>
             <a:endParaRPr lang="cs-CZ"/>
           </a:p>
@@ -455,7 +466,7 @@
           <a:p>
             <a:fld id="{BAB1D827-8AA8-4934-AFD2-771498CF3B22}" type="datetimeFigureOut">
               <a:rPr lang="cs-CZ" smtClean="0"/>
-              <a:t>15.01.2025</a:t>
+              <a:t>26.01.2025</a:t>
             </a:fld>
             <a:endParaRPr lang="cs-CZ"/>
           </a:p>
@@ -663,7 +674,7 @@
           <a:p>
             <a:fld id="{BAB1D827-8AA8-4934-AFD2-771498CF3B22}" type="datetimeFigureOut">
               <a:rPr lang="cs-CZ" smtClean="0"/>
-              <a:t>15.01.2025</a:t>
+              <a:t>26.01.2025</a:t>
             </a:fld>
             <a:endParaRPr lang="cs-CZ"/>
           </a:p>
@@ -861,7 +872,7 @@
           <a:p>
             <a:fld id="{BAB1D827-8AA8-4934-AFD2-771498CF3B22}" type="datetimeFigureOut">
               <a:rPr lang="cs-CZ" smtClean="0"/>
-              <a:t>15.01.2025</a:t>
+              <a:t>26.01.2025</a:t>
             </a:fld>
             <a:endParaRPr lang="cs-CZ"/>
           </a:p>
@@ -1136,7 +1147,7 @@
           <a:p>
             <a:fld id="{BAB1D827-8AA8-4934-AFD2-771498CF3B22}" type="datetimeFigureOut">
               <a:rPr lang="cs-CZ" smtClean="0"/>
-              <a:t>15.01.2025</a:t>
+              <a:t>26.01.2025</a:t>
             </a:fld>
             <a:endParaRPr lang="cs-CZ"/>
           </a:p>
@@ -1401,7 +1412,7 @@
           <a:p>
             <a:fld id="{BAB1D827-8AA8-4934-AFD2-771498CF3B22}" type="datetimeFigureOut">
               <a:rPr lang="cs-CZ" smtClean="0"/>
-              <a:t>15.01.2025</a:t>
+              <a:t>26.01.2025</a:t>
             </a:fld>
             <a:endParaRPr lang="cs-CZ"/>
           </a:p>
@@ -1813,7 +1824,7 @@
           <a:p>
             <a:fld id="{BAB1D827-8AA8-4934-AFD2-771498CF3B22}" type="datetimeFigureOut">
               <a:rPr lang="cs-CZ" smtClean="0"/>
-              <a:t>15.01.2025</a:t>
+              <a:t>26.01.2025</a:t>
             </a:fld>
             <a:endParaRPr lang="cs-CZ"/>
           </a:p>
@@ -1954,7 +1965,7 @@
           <a:p>
             <a:fld id="{BAB1D827-8AA8-4934-AFD2-771498CF3B22}" type="datetimeFigureOut">
               <a:rPr lang="cs-CZ" smtClean="0"/>
-              <a:t>15.01.2025</a:t>
+              <a:t>26.01.2025</a:t>
             </a:fld>
             <a:endParaRPr lang="cs-CZ"/>
           </a:p>
@@ -2067,7 +2078,7 @@
           <a:p>
             <a:fld id="{BAB1D827-8AA8-4934-AFD2-771498CF3B22}" type="datetimeFigureOut">
               <a:rPr lang="cs-CZ" smtClean="0"/>
-              <a:t>15.01.2025</a:t>
+              <a:t>26.01.2025</a:t>
             </a:fld>
             <a:endParaRPr lang="cs-CZ"/>
           </a:p>
@@ -2378,7 +2389,7 @@
           <a:p>
             <a:fld id="{BAB1D827-8AA8-4934-AFD2-771498CF3B22}" type="datetimeFigureOut">
               <a:rPr lang="cs-CZ" smtClean="0"/>
-              <a:t>15.01.2025</a:t>
+              <a:t>26.01.2025</a:t>
             </a:fld>
             <a:endParaRPr lang="cs-CZ"/>
           </a:p>
@@ -2666,7 +2677,7 @@
           <a:p>
             <a:fld id="{BAB1D827-8AA8-4934-AFD2-771498CF3B22}" type="datetimeFigureOut">
               <a:rPr lang="cs-CZ" smtClean="0"/>
-              <a:t>15.01.2025</a:t>
+              <a:t>26.01.2025</a:t>
             </a:fld>
             <a:endParaRPr lang="cs-CZ"/>
           </a:p>
@@ -2907,7 +2918,7 @@
           <a:p>
             <a:fld id="{BAB1D827-8AA8-4934-AFD2-771498CF3B22}" type="datetimeFigureOut">
               <a:rPr lang="cs-CZ" smtClean="0"/>
-              <a:t>15.01.2025</a:t>
+              <a:t>26.01.2025</a:t>
             </a:fld>
             <a:endParaRPr lang="cs-CZ"/>
           </a:p>
@@ -3508,7 +3519,495 @@
 </p:sld>
 </file>
 
+<file path=ppt/slides/slide10.xml><?xml version="1.0" encoding="utf-8"?>
+<p:sld xmlns:a="http://schemas.openxmlformats.org/drawingml/2006/main" xmlns:r="http://schemas.openxmlformats.org/officeDocument/2006/relationships" xmlns:p="http://schemas.openxmlformats.org/presentationml/2006/main">
+  <p:cSld>
+    <p:spTree>
+      <p:nvGrpSpPr>
+        <p:cNvPr id="1" name="">
+          <a:extLst>
+            <a:ext uri="{FF2B5EF4-FFF2-40B4-BE49-F238E27FC236}">
+              <a16:creationId xmlns:a16="http://schemas.microsoft.com/office/drawing/2014/main" id="{E33C36F7-0C81-3B44-4ABC-C8F1A6E8125F}"/>
+            </a:ext>
+          </a:extLst>
+        </p:cNvPr>
+        <p:cNvGrpSpPr/>
+        <p:nvPr/>
+      </p:nvGrpSpPr>
+      <p:grpSpPr>
+        <a:xfrm>
+          <a:off x="0" y="0"/>
+          <a:ext cx="0" cy="0"/>
+          <a:chOff x="0" y="0"/>
+          <a:chExt cx="0" cy="0"/>
+        </a:xfrm>
+      </p:grpSpPr>
+      <p:sp>
+        <p:nvSpPr>
+          <p:cNvPr id="4" name="Obdélník 3">
+            <a:extLst>
+              <a:ext uri="{FF2B5EF4-FFF2-40B4-BE49-F238E27FC236}">
+                <a16:creationId xmlns:a16="http://schemas.microsoft.com/office/drawing/2014/main" id="{8320E7AA-D76F-3213-649A-CC44D1B55C0B}"/>
+              </a:ext>
+            </a:extLst>
+          </p:cNvPr>
+          <p:cNvSpPr/>
+          <p:nvPr/>
+        </p:nvSpPr>
+        <p:spPr>
+          <a:xfrm>
+            <a:off x="-39148" y="0"/>
+            <a:ext cx="12231148" cy="6887361"/>
+          </a:xfrm>
+          <a:prstGeom prst="rect">
+            <a:avLst/>
+          </a:prstGeom>
+          <a:blipFill dpi="0" rotWithShape="1">
+            <a:blip r:embed="rId2">
+              <a:alphaModFix amt="87000"/>
+            </a:blip>
+            <a:srcRect/>
+            <a:stretch>
+              <a:fillRect/>
+            </a:stretch>
+          </a:blipFill>
+        </p:spPr>
+        <p:style>
+          <a:lnRef idx="2">
+            <a:schemeClr val="accent1">
+              <a:shade val="50000"/>
+            </a:schemeClr>
+          </a:lnRef>
+          <a:fillRef idx="1">
+            <a:schemeClr val="accent1"/>
+          </a:fillRef>
+          <a:effectRef idx="0">
+            <a:schemeClr val="accent1"/>
+          </a:effectRef>
+          <a:fontRef idx="minor">
+            <a:schemeClr val="lt1"/>
+          </a:fontRef>
+        </p:style>
+        <p:txBody>
+          <a:bodyPr rtlCol="0" anchor="ctr"/>
+          <a:lstStyle/>
+          <a:p>
+            <a:pPr algn="ctr"/>
+            <a:endParaRPr lang="cs-CZ"/>
+          </a:p>
+        </p:txBody>
+      </p:sp>
+      <p:sp>
+        <p:nvSpPr>
+          <p:cNvPr id="2" name="Nadpis 1">
+            <a:extLst>
+              <a:ext uri="{FF2B5EF4-FFF2-40B4-BE49-F238E27FC236}">
+                <a16:creationId xmlns:a16="http://schemas.microsoft.com/office/drawing/2014/main" id="{7A5C962E-8D0D-68E1-CA56-A87862CBE53D}"/>
+              </a:ext>
+            </a:extLst>
+          </p:cNvPr>
+          <p:cNvSpPr>
+            <a:spLocks noGrp="1"/>
+          </p:cNvSpPr>
+          <p:nvPr>
+            <p:ph type="ctrTitle"/>
+          </p:nvPr>
+        </p:nvSpPr>
+        <p:spPr>
+          <a:xfrm>
+            <a:off x="1524000" y="1122363"/>
+            <a:ext cx="9144000" cy="947069"/>
+          </a:xfrm>
+        </p:spPr>
+        <p:txBody>
+          <a:bodyPr/>
+          <a:lstStyle/>
+          <a:p>
+            <a:r>
+              <a:rPr lang="cs-CZ" dirty="0">
+                <a:solidFill>
+                  <a:schemeClr val="bg1"/>
+                </a:solidFill>
+              </a:rPr>
+              <a:t>Děkuji za pozornost</a:t>
+            </a:r>
+          </a:p>
+        </p:txBody>
+      </p:sp>
+      <p:sp>
+        <p:nvSpPr>
+          <p:cNvPr id="3" name="Podnadpis 2">
+            <a:extLst>
+              <a:ext uri="{FF2B5EF4-FFF2-40B4-BE49-F238E27FC236}">
+                <a16:creationId xmlns:a16="http://schemas.microsoft.com/office/drawing/2014/main" id="{08805DB5-D9B6-D73F-ED56-097F3408B800}"/>
+              </a:ext>
+            </a:extLst>
+          </p:cNvPr>
+          <p:cNvSpPr>
+            <a:spLocks noGrp="1"/>
+          </p:cNvSpPr>
+          <p:nvPr>
+            <p:ph type="subTitle" idx="1"/>
+          </p:nvPr>
+        </p:nvSpPr>
+        <p:spPr>
+          <a:xfrm>
+            <a:off x="1523998" y="5421647"/>
+            <a:ext cx="9144001" cy="947070"/>
+          </a:xfrm>
+        </p:spPr>
+        <p:txBody>
+          <a:bodyPr>
+            <a:normAutofit/>
+          </a:bodyPr>
+          <a:lstStyle/>
+          <a:p>
+            <a:pPr algn="l"/>
+            <a:r>
+              <a:rPr lang="cs-CZ" dirty="0">
+                <a:solidFill>
+                  <a:schemeClr val="bg1"/>
+                </a:solidFill>
+              </a:rPr>
+              <a:t>Zdroj:</a:t>
+            </a:r>
+          </a:p>
+          <a:p>
+            <a:pPr algn="l"/>
+            <a:r>
+              <a:rPr lang="cs-CZ" dirty="0">
+                <a:solidFill>
+                  <a:schemeClr val="bg1"/>
+                </a:solidFill>
+              </a:rPr>
+              <a:t>https://pruvodce.ucw.cz/static/pruvodce.pdf</a:t>
+            </a:r>
+          </a:p>
+        </p:txBody>
+      </p:sp>
+    </p:spTree>
+    <p:extLst>
+      <p:ext uri="{BB962C8B-B14F-4D97-AF65-F5344CB8AC3E}">
+        <p14:creationId xmlns:p14="http://schemas.microsoft.com/office/powerpoint/2010/main" val="3078064884"/>
+      </p:ext>
+    </p:extLst>
+  </p:cSld>
+  <p:clrMapOvr>
+    <a:masterClrMapping/>
+  </p:clrMapOvr>
+</p:sld>
+</file>
+
 <file path=ppt/slides/slide2.xml><?xml version="1.0" encoding="utf-8"?>
+<p:sld xmlns:a="http://schemas.openxmlformats.org/drawingml/2006/main" xmlns:r="http://schemas.openxmlformats.org/officeDocument/2006/relationships" xmlns:p="http://schemas.openxmlformats.org/presentationml/2006/main">
+  <p:cSld>
+    <p:spTree>
+      <p:nvGrpSpPr>
+        <p:cNvPr id="1" name=""/>
+        <p:cNvGrpSpPr/>
+        <p:nvPr/>
+      </p:nvGrpSpPr>
+      <p:grpSpPr>
+        <a:xfrm>
+          <a:off x="0" y="0"/>
+          <a:ext cx="0" cy="0"/>
+          <a:chOff x="0" y="0"/>
+          <a:chExt cx="0" cy="0"/>
+        </a:xfrm>
+      </p:grpSpPr>
+      <p:sp>
+        <p:nvSpPr>
+          <p:cNvPr id="4" name="Obdélník 3">
+            <a:extLst>
+              <a:ext uri="{FF2B5EF4-FFF2-40B4-BE49-F238E27FC236}">
+                <a16:creationId xmlns:a16="http://schemas.microsoft.com/office/drawing/2014/main" id="{2F9D6135-527A-4CDC-92E5-CFFB796A921B}"/>
+              </a:ext>
+            </a:extLst>
+          </p:cNvPr>
+          <p:cNvSpPr/>
+          <p:nvPr/>
+        </p:nvSpPr>
+        <p:spPr>
+          <a:xfrm>
+            <a:off x="-39148" y="0"/>
+            <a:ext cx="12231148" cy="6887361"/>
+          </a:xfrm>
+          <a:prstGeom prst="rect">
+            <a:avLst/>
+          </a:prstGeom>
+          <a:blipFill dpi="0" rotWithShape="1">
+            <a:blip r:embed="rId2">
+              <a:alphaModFix amt="87000"/>
+            </a:blip>
+            <a:srcRect/>
+            <a:stretch>
+              <a:fillRect/>
+            </a:stretch>
+          </a:blipFill>
+        </p:spPr>
+        <p:style>
+          <a:lnRef idx="2">
+            <a:schemeClr val="accent1">
+              <a:shade val="50000"/>
+            </a:schemeClr>
+          </a:lnRef>
+          <a:fillRef idx="1">
+            <a:schemeClr val="accent1"/>
+          </a:fillRef>
+          <a:effectRef idx="0">
+            <a:schemeClr val="accent1"/>
+          </a:effectRef>
+          <a:fontRef idx="minor">
+            <a:schemeClr val="lt1"/>
+          </a:fontRef>
+        </p:style>
+        <p:txBody>
+          <a:bodyPr rtlCol="0" anchor="ctr"/>
+          <a:lstStyle/>
+          <a:p>
+            <a:pPr algn="ctr"/>
+            <a:endParaRPr lang="cs-CZ"/>
+          </a:p>
+        </p:txBody>
+      </p:sp>
+      <p:sp>
+        <p:nvSpPr>
+          <p:cNvPr id="2" name="Nadpis 1">
+            <a:extLst>
+              <a:ext uri="{FF2B5EF4-FFF2-40B4-BE49-F238E27FC236}">
+                <a16:creationId xmlns:a16="http://schemas.microsoft.com/office/drawing/2014/main" id="{74D3CABF-499C-471D-9901-17228A1B95EE}"/>
+              </a:ext>
+            </a:extLst>
+          </p:cNvPr>
+          <p:cNvSpPr>
+            <a:spLocks noGrp="1"/>
+          </p:cNvSpPr>
+          <p:nvPr>
+            <p:ph type="ctrTitle"/>
+          </p:nvPr>
+        </p:nvSpPr>
+        <p:spPr>
+          <a:xfrm>
+            <a:off x="1524000" y="362117"/>
+            <a:ext cx="9144000" cy="959268"/>
+          </a:xfrm>
+        </p:spPr>
+        <p:txBody>
+          <a:bodyPr/>
+          <a:lstStyle/>
+          <a:p>
+            <a:r>
+              <a:rPr lang="cs-CZ" dirty="0">
+                <a:solidFill>
+                  <a:schemeClr val="bg1"/>
+                </a:solidFill>
+              </a:rPr>
+              <a:t>Josef </a:t>
+            </a:r>
+            <a:r>
+              <a:rPr lang="cs-CZ" dirty="0" err="1">
+                <a:solidFill>
+                  <a:schemeClr val="bg1"/>
+                </a:solidFill>
+              </a:rPr>
+              <a:t>Kruskal</a:t>
+            </a:r>
+            <a:endParaRPr lang="cs-CZ" dirty="0">
+              <a:solidFill>
+                <a:schemeClr val="bg1"/>
+              </a:solidFill>
+            </a:endParaRPr>
+          </a:p>
+        </p:txBody>
+      </p:sp>
+      <p:sp>
+        <p:nvSpPr>
+          <p:cNvPr id="6" name="Podnadpis 5">
+            <a:extLst>
+              <a:ext uri="{FF2B5EF4-FFF2-40B4-BE49-F238E27FC236}">
+                <a16:creationId xmlns:a16="http://schemas.microsoft.com/office/drawing/2014/main" id="{65B26507-9A4F-450D-AB34-BBFFFA8D268C}"/>
+              </a:ext>
+            </a:extLst>
+          </p:cNvPr>
+          <p:cNvSpPr>
+            <a:spLocks noGrp="1"/>
+          </p:cNvSpPr>
+          <p:nvPr>
+            <p:ph type="subTitle" idx="1"/>
+          </p:nvPr>
+        </p:nvSpPr>
+        <p:spPr>
+          <a:xfrm>
+            <a:off x="1524000" y="1620730"/>
+            <a:ext cx="9144000" cy="4411102"/>
+          </a:xfrm>
+        </p:spPr>
+        <p:txBody>
+          <a:bodyPr/>
+          <a:lstStyle/>
+          <a:p>
+            <a:pPr marL="342900" indent="-342900" algn="l">
+              <a:buFont typeface="Arial" panose="020B0604020202020204" pitchFamily="34" charset="0"/>
+              <a:buChar char="•"/>
+            </a:pPr>
+            <a:r>
+              <a:rPr lang="cs-CZ" dirty="0">
+                <a:solidFill>
+                  <a:schemeClr val="bg1"/>
+                </a:solidFill>
+              </a:rPr>
+              <a:t>1928  NY - 2010</a:t>
+            </a:r>
+          </a:p>
+          <a:p>
+            <a:pPr marL="342900" indent="-342900" algn="l">
+              <a:buFont typeface="Arial" panose="020B0604020202020204" pitchFamily="34" charset="0"/>
+              <a:buChar char="•"/>
+            </a:pPr>
+            <a:r>
+              <a:rPr lang="cs-CZ" dirty="0">
+                <a:solidFill>
+                  <a:schemeClr val="bg1"/>
+                </a:solidFill>
+              </a:rPr>
+              <a:t>Matematik, Informatik, Statistik</a:t>
+            </a:r>
+          </a:p>
+          <a:p>
+            <a:pPr marL="342900" indent="-342900" algn="l">
+              <a:buFont typeface="Arial" panose="020B0604020202020204" pitchFamily="34" charset="0"/>
+              <a:buChar char="•"/>
+            </a:pPr>
+            <a:r>
+              <a:rPr lang="cs-CZ" dirty="0">
+                <a:solidFill>
+                  <a:schemeClr val="bg1"/>
+                </a:solidFill>
+              </a:rPr>
+              <a:t>University </a:t>
+            </a:r>
+            <a:r>
+              <a:rPr lang="cs-CZ" dirty="0" err="1">
+                <a:solidFill>
+                  <a:schemeClr val="bg1"/>
+                </a:solidFill>
+              </a:rPr>
+              <a:t>of</a:t>
+            </a:r>
+            <a:r>
+              <a:rPr lang="cs-CZ" dirty="0">
+                <a:solidFill>
+                  <a:schemeClr val="bg1"/>
+                </a:solidFill>
+              </a:rPr>
+              <a:t> Chicago, </a:t>
+            </a:r>
+            <a:r>
+              <a:rPr lang="cs-CZ" dirty="0" err="1">
+                <a:solidFill>
+                  <a:schemeClr val="bg1"/>
+                </a:solidFill>
+              </a:rPr>
+              <a:t>Princeton</a:t>
+            </a:r>
+            <a:r>
+              <a:rPr lang="cs-CZ" dirty="0">
+                <a:solidFill>
+                  <a:schemeClr val="bg1"/>
+                </a:solidFill>
+              </a:rPr>
+              <a:t> University</a:t>
+            </a:r>
+          </a:p>
+          <a:p>
+            <a:pPr marL="342900" indent="-342900" algn="l">
+              <a:buFont typeface="Arial" panose="020B0604020202020204" pitchFamily="34" charset="0"/>
+              <a:buChar char="•"/>
+            </a:pPr>
+            <a:r>
+              <a:rPr lang="cs-CZ" dirty="0" err="1">
+                <a:solidFill>
+                  <a:schemeClr val="bg1"/>
+                </a:solidFill>
+              </a:rPr>
+              <a:t>Kruskalův</a:t>
+            </a:r>
+            <a:r>
+              <a:rPr lang="cs-CZ" dirty="0">
+                <a:solidFill>
+                  <a:schemeClr val="bg1"/>
+                </a:solidFill>
+              </a:rPr>
+              <a:t> algoritmus</a:t>
+            </a:r>
+          </a:p>
+          <a:p>
+            <a:pPr marL="342900" indent="-342900" algn="l">
+              <a:buFont typeface="Arial" panose="020B0604020202020204" pitchFamily="34" charset="0"/>
+              <a:buChar char="•"/>
+            </a:pPr>
+            <a:r>
+              <a:rPr lang="cs-CZ" dirty="0" err="1">
+                <a:solidFill>
+                  <a:schemeClr val="bg1"/>
+                </a:solidFill>
+              </a:rPr>
+              <a:t>Kruskalova</a:t>
+            </a:r>
+            <a:r>
+              <a:rPr lang="cs-CZ" dirty="0">
+                <a:solidFill>
+                  <a:schemeClr val="bg1"/>
+                </a:solidFill>
+              </a:rPr>
+              <a:t> teorie stromů</a:t>
+            </a:r>
+          </a:p>
+          <a:p>
+            <a:pPr marL="342900" indent="-342900" algn="l">
+              <a:buFont typeface="Arial" panose="020B0604020202020204" pitchFamily="34" charset="0"/>
+              <a:buChar char="•"/>
+            </a:pPr>
+            <a:r>
+              <a:rPr lang="cs-CZ" dirty="0" err="1">
+                <a:solidFill>
+                  <a:schemeClr val="bg1"/>
+                </a:solidFill>
+              </a:rPr>
+              <a:t>Kruskal</a:t>
+            </a:r>
+            <a:r>
+              <a:rPr lang="cs-CZ" dirty="0">
+                <a:solidFill>
+                  <a:schemeClr val="bg1"/>
+                </a:solidFill>
+              </a:rPr>
+              <a:t>-Katonova teorie</a:t>
+            </a:r>
+          </a:p>
+          <a:p>
+            <a:pPr marL="342900" indent="-342900" algn="l">
+              <a:buFont typeface="Arial" panose="020B0604020202020204" pitchFamily="34" charset="0"/>
+              <a:buChar char="•"/>
+            </a:pPr>
+            <a:endParaRPr lang="cs-CZ" dirty="0"/>
+          </a:p>
+        </p:txBody>
+      </p:sp>
+    </p:spTree>
+    <p:extLst>
+      <p:ext uri="{BB962C8B-B14F-4D97-AF65-F5344CB8AC3E}">
+        <p14:creationId xmlns:p14="http://schemas.microsoft.com/office/powerpoint/2010/main" val="407906920"/>
+      </p:ext>
+    </p:extLst>
+  </p:cSld>
+  <p:clrMapOvr>
+    <a:masterClrMapping/>
+  </p:clrMapOvr>
+</p:sld>
+</file>
+
+<file path=ppt/slides/slide3.xml><?xml version="1.0" encoding="utf-8"?>
 <p:sld xmlns:a="http://schemas.openxmlformats.org/drawingml/2006/main" xmlns:r="http://schemas.openxmlformats.org/officeDocument/2006/relationships" xmlns:p="http://schemas.openxmlformats.org/presentationml/2006/main">
   <p:cSld>
     <p:spTree>
@@ -3577,12 +4076,130 @@
           <a:lstStyle/>
           <a:p>
             <a:r>
+              <a:rPr lang="cs-CZ" dirty="0">
+                <a:solidFill>
+                  <a:schemeClr val="bg1"/>
+                </a:solidFill>
+              </a:rPr>
+              <a:t>Algoritmus</a:t>
+            </a:r>
+          </a:p>
+        </p:txBody>
+      </p:sp>
+      <p:sp>
+        <p:nvSpPr>
+          <p:cNvPr id="3" name="Zástupný obsah 2">
+            <a:extLst>
+              <a:ext uri="{FF2B5EF4-FFF2-40B4-BE49-F238E27FC236}">
+                <a16:creationId xmlns:a16="http://schemas.microsoft.com/office/drawing/2014/main" id="{028BCE23-179A-4EE7-81DD-C9F7220D5641}"/>
+              </a:ext>
+            </a:extLst>
+          </p:cNvPr>
+          <p:cNvSpPr>
+            <a:spLocks noGrp="1"/>
+          </p:cNvSpPr>
+          <p:nvPr>
+            <p:ph idx="1"/>
+          </p:nvPr>
+        </p:nvSpPr>
+        <p:spPr>
+          <a:xfrm>
+            <a:off x="838200" y="1825624"/>
+            <a:ext cx="10515600" cy="4799765"/>
+          </a:xfrm>
+        </p:spPr>
+        <p:txBody>
+          <a:bodyPr>
+            <a:normAutofit/>
+          </a:bodyPr>
+          <a:lstStyle/>
+          <a:p>
+            <a:pPr marL="0" indent="0">
+              <a:buNone/>
+            </a:pPr>
+            <a:r>
+              <a:rPr lang="cs-CZ" dirty="0">
+                <a:solidFill>
+                  <a:schemeClr val="bg1"/>
+                </a:solidFill>
+              </a:rPr>
+              <a:t>Vstupem je souvislý graf s unikátními váhami</a:t>
+            </a:r>
+          </a:p>
+          <a:p>
+            <a:pPr marL="514350" indent="-514350">
+              <a:buAutoNum type="arabicPeriod"/>
+            </a:pPr>
+            <a:r>
+              <a:rPr lang="cs-CZ" dirty="0">
+                <a:solidFill>
+                  <a:schemeClr val="bg1"/>
+                </a:solidFill>
+              </a:rPr>
+              <a:t>Uspořádáme hrany podle vah: w(e1) &lt; . . . &lt; w(</a:t>
+            </a:r>
+            <a:r>
               <a:rPr lang="cs-CZ" dirty="0" err="1">
                 <a:solidFill>
                   <a:schemeClr val="bg1"/>
                 </a:solidFill>
               </a:rPr>
-              <a:t>Algorytmus</a:t>
+              <a:t>em</a:t>
+            </a:r>
+            <a:r>
+              <a:rPr lang="cs-CZ" dirty="0">
+                <a:solidFill>
+                  <a:schemeClr val="bg1"/>
+                </a:solidFill>
+              </a:rPr>
+              <a:t>).</a:t>
+            </a:r>
+          </a:p>
+          <a:p>
+            <a:pPr marL="514350" indent="-514350">
+              <a:buAutoNum type="arabicPeriod"/>
+            </a:pPr>
+            <a:r>
+              <a:rPr lang="cs-CZ" dirty="0">
+                <a:solidFill>
+                  <a:schemeClr val="bg1"/>
+                </a:solidFill>
+              </a:rPr>
+              <a:t>T ← (V, ∅) / začneme lesem samých izolovaných vrcholů</a:t>
+            </a:r>
+          </a:p>
+          <a:p>
+            <a:pPr marL="514350" indent="-514350">
+              <a:buAutoNum type="arabicPeriod"/>
+            </a:pPr>
+            <a:r>
+              <a:rPr lang="cs-CZ" dirty="0">
+                <a:solidFill>
+                  <a:schemeClr val="bg1"/>
+                </a:solidFill>
+              </a:rPr>
+              <a:t>Pro i = 1, . . . , m opakujeme:</a:t>
+            </a:r>
+          </a:p>
+          <a:p>
+            <a:pPr marL="514350" indent="-514350">
+              <a:buAutoNum type="arabicPeriod"/>
+            </a:pPr>
+            <a:r>
+              <a:rPr lang="cs-CZ" dirty="0">
+                <a:solidFill>
+                  <a:schemeClr val="bg1"/>
+                </a:solidFill>
+              </a:rPr>
+              <a:t>       u, v ← krajní vrcholy hrany </a:t>
+            </a:r>
+            <a:r>
+              <a:rPr lang="cs-CZ" dirty="0" err="1">
+                <a:solidFill>
+                  <a:schemeClr val="bg1"/>
+                </a:solidFill>
+              </a:rPr>
+              <a:t>ei</a:t>
             </a:r>
             <a:endParaRPr lang="cs-CZ" dirty="0">
               <a:solidFill>
@@ -3590,35 +4207,48 @@
               </a:solidFill>
             </a:endParaRPr>
           </a:p>
-        </p:txBody>
-      </p:sp>
-      <p:sp>
-        <p:nvSpPr>
-          <p:cNvPr id="3" name="Zástupný obsah 2">
-            <a:extLst>
-              <a:ext uri="{FF2B5EF4-FFF2-40B4-BE49-F238E27FC236}">
-                <a16:creationId xmlns:a16="http://schemas.microsoft.com/office/drawing/2014/main" id="{028BCE23-179A-4EE7-81DD-C9F7220D5641}"/>
-              </a:ext>
-            </a:extLst>
-          </p:cNvPr>
-          <p:cNvSpPr>
-            <a:spLocks noGrp="1"/>
-          </p:cNvSpPr>
-          <p:nvPr>
-            <p:ph idx="1"/>
-          </p:nvPr>
-        </p:nvSpPr>
-        <p:spPr>
-          <a:xfrm>
-            <a:off x="838200" y="1825624"/>
-            <a:ext cx="10515600" cy="4365625"/>
-          </a:xfrm>
-        </p:spPr>
-        <p:txBody>
-          <a:bodyPr>
-            <a:normAutofit/>
-          </a:bodyPr>
-          <a:lstStyle/>
+          <a:p>
+            <a:pPr marL="514350" indent="-514350">
+              <a:buAutoNum type="arabicPeriod"/>
+            </a:pPr>
+            <a:r>
+              <a:rPr lang="cs-CZ" dirty="0">
+                <a:solidFill>
+                  <a:schemeClr val="bg1"/>
+                </a:solidFill>
+              </a:rPr>
+              <a:t>       Pokud u a v leží v různých komponentách lesa T:</a:t>
+            </a:r>
+          </a:p>
+          <a:p>
+            <a:pPr marL="514350" indent="-514350">
+              <a:buAutoNum type="arabicPeriod"/>
+            </a:pPr>
+            <a:r>
+              <a:rPr lang="cs-CZ" dirty="0">
+                <a:solidFill>
+                  <a:schemeClr val="bg1"/>
+                </a:solidFill>
+              </a:rPr>
+              <a:t>              T ← T + </a:t>
+            </a:r>
+            <a:r>
+              <a:rPr lang="cs-CZ" dirty="0" err="1">
+                <a:solidFill>
+                  <a:schemeClr val="bg1"/>
+                </a:solidFill>
+              </a:rPr>
+              <a:t>ei</a:t>
+            </a:r>
+            <a:r>
+              <a:rPr lang="cs-CZ" dirty="0">
+                <a:solidFill>
+                  <a:schemeClr val="bg1"/>
+                </a:solidFill>
+              </a:rPr>
+              <a:t> </a:t>
+            </a:r>
+          </a:p>
           <a:p>
             <a:pPr marL="0" indent="0">
               <a:buNone/>
@@ -3629,130 +4259,7 @@
                   <a:schemeClr val="bg1"/>
                 </a:solidFill>
               </a:rPr>
-              <a:t>Vstupem je souvislý graf s unikátními váhami</a:t>
-            </a:r>
-          </a:p>
-          <a:p>
-            <a:pPr marL="514350" indent="-514350">
-              <a:buAutoNum type="arabicPeriod"/>
-            </a:pPr>
-            <a:r>
-              <a:rPr lang="cs-CZ" dirty="0">
-                <a:solidFill>
-                  <a:schemeClr val="bg1"/>
-                </a:solidFill>
-              </a:rPr>
-              <a:t>Uspořádáme hrany podle vah: w(e1) &lt; . . . &lt; w(</a:t>
-            </a:r>
-            <a:r>
-              <a:rPr lang="cs-CZ" dirty="0" err="1">
-                <a:solidFill>
-                  <a:schemeClr val="bg1"/>
-                </a:solidFill>
-              </a:rPr>
-              <a:t>em</a:t>
-            </a:r>
-            <a:r>
-              <a:rPr lang="cs-CZ" dirty="0">
-                <a:solidFill>
-                  <a:schemeClr val="bg1"/>
-                </a:solidFill>
-              </a:rPr>
-              <a:t>).</a:t>
-            </a:r>
-          </a:p>
-          <a:p>
-            <a:pPr marL="514350" indent="-514350">
-              <a:buAutoNum type="arabicPeriod"/>
-            </a:pPr>
-            <a:r>
-              <a:rPr lang="cs-CZ" dirty="0">
-                <a:solidFill>
-                  <a:schemeClr val="bg1"/>
-                </a:solidFill>
-              </a:rPr>
-              <a:t>2. T ← (V, ∅) / začneme lesem samých izolovaných vrcholů</a:t>
-            </a:r>
-          </a:p>
-          <a:p>
-            <a:pPr marL="514350" indent="-514350">
-              <a:buAutoNum type="arabicPeriod"/>
-            </a:pPr>
-            <a:r>
-              <a:rPr lang="cs-CZ" dirty="0">
-                <a:solidFill>
-                  <a:schemeClr val="bg1"/>
-                </a:solidFill>
-              </a:rPr>
-              <a:t>3. Pro i = 1, . . . , m opakujeme:</a:t>
-            </a:r>
-          </a:p>
-          <a:p>
-            <a:pPr marL="514350" indent="-514350">
-              <a:buAutoNum type="arabicPeriod"/>
-            </a:pPr>
-            <a:r>
-              <a:rPr lang="cs-CZ" dirty="0">
-                <a:solidFill>
-                  <a:schemeClr val="bg1"/>
-                </a:solidFill>
-              </a:rPr>
-              <a:t>4. u, v ← krajní vrcholy hrany </a:t>
-            </a:r>
-            <a:r>
-              <a:rPr lang="cs-CZ" dirty="0" err="1">
-                <a:solidFill>
-                  <a:schemeClr val="bg1"/>
-                </a:solidFill>
-              </a:rPr>
-              <a:t>ei</a:t>
-            </a:r>
-            <a:endParaRPr lang="cs-CZ" dirty="0">
-              <a:solidFill>
-                <a:schemeClr val="bg1"/>
-              </a:solidFill>
-            </a:endParaRPr>
-          </a:p>
-          <a:p>
-            <a:pPr marL="514350" indent="-514350">
-              <a:buAutoNum type="arabicPeriod"/>
-            </a:pPr>
-            <a:r>
-              <a:rPr lang="cs-CZ" dirty="0">
-                <a:solidFill>
-                  <a:schemeClr val="bg1"/>
-                </a:solidFill>
-              </a:rPr>
-              <a:t>5. Pokud u a v leží v různých komponentách lesa T:</a:t>
-            </a:r>
-          </a:p>
-          <a:p>
-            <a:pPr marL="514350" indent="-514350">
-              <a:buAutoNum type="arabicPeriod"/>
-            </a:pPr>
-            <a:r>
-              <a:rPr lang="cs-CZ" dirty="0">
-                <a:solidFill>
-                  <a:schemeClr val="bg1"/>
-                </a:solidFill>
-              </a:rPr>
-              <a:t>6. T ← T + </a:t>
-            </a:r>
-            <a:r>
-              <a:rPr lang="cs-CZ" dirty="0" err="1">
-                <a:solidFill>
-                  <a:schemeClr val="bg1"/>
-                </a:solidFill>
-              </a:rPr>
-              <a:t>ei</a:t>
-            </a:r>
-            <a:r>
-              <a:rPr lang="cs-CZ" dirty="0">
-                <a:solidFill>
-                  <a:schemeClr val="bg1"/>
-                </a:solidFill>
-              </a:rPr>
-              <a:t> </a:t>
+              <a:t>Výstupem je minimální kostra T</a:t>
             </a:r>
           </a:p>
           <a:p>
@@ -3765,7 +4272,23 @@
                   <a:schemeClr val="bg1"/>
                 </a:solidFill>
               </a:rPr>
-              <a:t>Výstupem je minimální kostra T</a:t>
+              <a:t>O(</a:t>
+            </a:r>
+            <a:r>
+              <a:rPr lang="cs-CZ" dirty="0" err="1">
+                <a:solidFill>
+                  <a:schemeClr val="bg1"/>
+                </a:solidFill>
+              </a:rPr>
+              <a:t>nm</a:t>
+            </a:r>
+            <a:r>
+              <a:rPr lang="cs-CZ" dirty="0">
+                <a:solidFill>
+                  <a:schemeClr val="bg1"/>
+                </a:solidFill>
+              </a:rPr>
+              <a:t>)</a:t>
             </a:r>
           </a:p>
         </p:txBody>
@@ -3783,7 +4306,7 @@
 </p:sld>
 </file>
 
-<file path=ppt/slides/slide3.xml><?xml version="1.0" encoding="utf-8"?>
+<file path=ppt/slides/slide4.xml><?xml version="1.0" encoding="utf-8"?>
 <p:sld xmlns:a="http://schemas.openxmlformats.org/drawingml/2006/main" xmlns:r="http://schemas.openxmlformats.org/officeDocument/2006/relationships" xmlns:p="http://schemas.openxmlformats.org/presentationml/2006/main">
   <p:cSld>
     <p:spTree>
@@ -6944,12 +7467,18 @@
 </p:sld>
 </file>
 
-<file path=ppt/slides/slide4.xml><?xml version="1.0" encoding="utf-8"?>
+<file path=ppt/slides/slide5.xml><?xml version="1.0" encoding="utf-8"?>
 <p:sld xmlns:a="http://schemas.openxmlformats.org/drawingml/2006/main" xmlns:r="http://schemas.openxmlformats.org/officeDocument/2006/relationships" xmlns:p="http://schemas.openxmlformats.org/presentationml/2006/main">
   <p:cSld>
     <p:spTree>
       <p:nvGrpSpPr>
-        <p:cNvPr id="1" name=""/>
+        <p:cNvPr id="1" name="">
+          <a:extLst>
+            <a:ext uri="{FF2B5EF4-FFF2-40B4-BE49-F238E27FC236}">
+              <a16:creationId xmlns:a16="http://schemas.microsoft.com/office/drawing/2014/main" id="{05AA02AF-17F8-025E-5D67-3026D2FD9AB8}"/>
+            </a:ext>
+          </a:extLst>
+        </p:cNvPr>
         <p:cNvGrpSpPr/>
         <p:nvPr/>
       </p:nvGrpSpPr>
@@ -6966,7 +7495,7 @@
           <p:cNvPr id="4" name="Obdélník 3">
             <a:extLst>
               <a:ext uri="{FF2B5EF4-FFF2-40B4-BE49-F238E27FC236}">
-                <a16:creationId xmlns:a16="http://schemas.microsoft.com/office/drawing/2014/main" id="{2F9D6135-527A-4CDC-92E5-CFFB796A921B}"/>
+                <a16:creationId xmlns:a16="http://schemas.microsoft.com/office/drawing/2014/main" id="{13BC5482-7C5C-AD7B-FD6E-BD4B47F7941D}"/>
               </a:ext>
             </a:extLst>
           </p:cNvPr>
@@ -7021,7 +7550,7 @@
           <p:cNvPr id="2" name="Nadpis 1">
             <a:extLst>
               <a:ext uri="{FF2B5EF4-FFF2-40B4-BE49-F238E27FC236}">
-                <a16:creationId xmlns:a16="http://schemas.microsoft.com/office/drawing/2014/main" id="{74D3CABF-499C-471D-9901-17228A1B95EE}"/>
+                <a16:creationId xmlns:a16="http://schemas.microsoft.com/office/drawing/2014/main" id="{5DAD32E8-743D-9CF3-2897-9EB3728C86ED}"/>
               </a:ext>
             </a:extLst>
           </p:cNvPr>
@@ -7032,11 +7561,32 @@
             <p:ph type="ctrTitle"/>
           </p:nvPr>
         </p:nvSpPr>
-        <p:spPr/>
+        <p:spPr>
+          <a:xfrm>
+            <a:off x="1524000" y="1122363"/>
+            <a:ext cx="9144000" cy="947069"/>
+          </a:xfrm>
+        </p:spPr>
         <p:txBody>
           <a:bodyPr/>
           <a:lstStyle/>
           <a:p>
+            <a:r>
+              <a:rPr lang="cs-CZ" dirty="0">
+                <a:solidFill>
+                  <a:schemeClr val="bg1"/>
+                </a:solidFill>
+              </a:rPr>
+              <a:t>Union-</a:t>
+            </a:r>
+            <a:r>
+              <a:rPr lang="cs-CZ" dirty="0" err="1">
+                <a:solidFill>
+                  <a:schemeClr val="bg1"/>
+                </a:solidFill>
+              </a:rPr>
+              <a:t>Find</a:t>
+            </a:r>
             <a:endParaRPr lang="cs-CZ" dirty="0">
               <a:solidFill>
                 <a:schemeClr val="bg1"/>
@@ -7047,10 +7597,10 @@
       </p:sp>
       <p:sp>
         <p:nvSpPr>
-          <p:cNvPr id="6" name="Podnadpis 5">
-            <a:extLst>
-              <a:ext uri="{FF2B5EF4-FFF2-40B4-BE49-F238E27FC236}">
-                <a16:creationId xmlns:a16="http://schemas.microsoft.com/office/drawing/2014/main" id="{65B26507-9A4F-450D-AB34-BBFFFA8D268C}"/>
+          <p:cNvPr id="3" name="Podnadpis 2">
+            <a:extLst>
+              <a:ext uri="{FF2B5EF4-FFF2-40B4-BE49-F238E27FC236}">
+                <a16:creationId xmlns:a16="http://schemas.microsoft.com/office/drawing/2014/main" id="{B41C0641-472D-0132-8062-DADA18755AD2}"/>
               </a:ext>
             </a:extLst>
           </p:cNvPr>
@@ -7061,19 +7611,1467 @@
             <p:ph type="subTitle" idx="1"/>
           </p:nvPr>
         </p:nvSpPr>
-        <p:spPr/>
-        <p:txBody>
-          <a:bodyPr/>
-          <a:lstStyle/>
-          <a:p>
-            <a:endParaRPr lang="cs-CZ"/>
+        <p:spPr>
+          <a:xfrm>
+            <a:off x="1524000" y="2227039"/>
+            <a:ext cx="9144000" cy="4109593"/>
+          </a:xfrm>
+        </p:spPr>
+        <p:txBody>
+          <a:bodyPr>
+            <a:normAutofit/>
+          </a:bodyPr>
+          <a:lstStyle/>
+          <a:p>
+            <a:pPr algn="l"/>
+            <a:r>
+              <a:rPr lang="cs-CZ" dirty="0">
+                <a:solidFill>
+                  <a:schemeClr val="bg1"/>
+                </a:solidFill>
+              </a:rPr>
+              <a:t>Union-</a:t>
+            </a:r>
+            <a:r>
+              <a:rPr lang="cs-CZ" dirty="0" err="1">
+                <a:solidFill>
+                  <a:schemeClr val="bg1"/>
+                </a:solidFill>
+              </a:rPr>
+              <a:t>Find</a:t>
+            </a:r>
+            <a:r>
+              <a:rPr lang="cs-CZ" dirty="0">
+                <a:solidFill>
+                  <a:schemeClr val="bg1"/>
+                </a:solidFill>
+              </a:rPr>
+              <a:t> reprezentuje komponenty v souvislosti grafu a umí na nich provádět následující funkce</a:t>
+            </a:r>
+          </a:p>
+          <a:p>
+            <a:pPr marL="342900" indent="-342900" algn="l">
+              <a:buFont typeface="Arial" panose="020B0604020202020204" pitchFamily="34" charset="0"/>
+              <a:buChar char="•"/>
+            </a:pPr>
+            <a:r>
+              <a:rPr lang="cs-CZ" dirty="0" err="1">
+                <a:solidFill>
+                  <a:schemeClr val="bg1"/>
+                </a:solidFill>
+              </a:rPr>
+              <a:t>Find</a:t>
+            </a:r>
+            <a:r>
+              <a:rPr lang="cs-CZ" dirty="0">
+                <a:solidFill>
+                  <a:schemeClr val="bg1"/>
+                </a:solidFill>
+              </a:rPr>
+              <a:t>(</a:t>
+            </a:r>
+            <a:r>
+              <a:rPr lang="cs-CZ" dirty="0" err="1">
+                <a:solidFill>
+                  <a:schemeClr val="bg1"/>
+                </a:solidFill>
+              </a:rPr>
+              <a:t>u,v</a:t>
+            </a:r>
+            <a:r>
+              <a:rPr lang="cs-CZ" dirty="0">
+                <a:solidFill>
+                  <a:schemeClr val="bg1"/>
+                </a:solidFill>
+              </a:rPr>
+              <a:t>) zjistí, zda vrcholy u a v leží v téže komponentě.</a:t>
+            </a:r>
+          </a:p>
+          <a:p>
+            <a:pPr marL="342900" indent="-342900" algn="l">
+              <a:buFont typeface="Arial" panose="020B0604020202020204" pitchFamily="34" charset="0"/>
+              <a:buChar char="•"/>
+            </a:pPr>
+            <a:r>
+              <a:rPr lang="cs-CZ" dirty="0">
+                <a:solidFill>
+                  <a:schemeClr val="bg1"/>
+                </a:solidFill>
+              </a:rPr>
+              <a:t>Union(</a:t>
+            </a:r>
+            <a:r>
+              <a:rPr lang="cs-CZ" dirty="0" err="1">
+                <a:solidFill>
+                  <a:schemeClr val="bg1"/>
+                </a:solidFill>
+              </a:rPr>
+              <a:t>u,v</a:t>
+            </a:r>
+            <a:r>
+              <a:rPr lang="cs-CZ" dirty="0">
+                <a:solidFill>
+                  <a:schemeClr val="bg1"/>
+                </a:solidFill>
+              </a:rPr>
+              <a:t>) přidá hranu </a:t>
+            </a:r>
+            <a:r>
+              <a:rPr lang="cs-CZ" dirty="0" err="1">
+                <a:solidFill>
+                  <a:schemeClr val="bg1"/>
+                </a:solidFill>
+              </a:rPr>
+              <a:t>uv</a:t>
+            </a:r>
+            <a:r>
+              <a:rPr lang="cs-CZ" dirty="0">
+                <a:solidFill>
+                  <a:schemeClr val="bg1"/>
+                </a:solidFill>
+              </a:rPr>
+              <a:t>, čili dvě komponenty spojí do jedné.</a:t>
+            </a:r>
+          </a:p>
+          <a:p>
+            <a:pPr algn="l"/>
+            <a:endParaRPr lang="cs-CZ" dirty="0"/>
           </a:p>
         </p:txBody>
       </p:sp>
     </p:spTree>
     <p:extLst>
       <p:ext uri="{BB962C8B-B14F-4D97-AF65-F5344CB8AC3E}">
-        <p14:creationId xmlns:p14="http://schemas.microsoft.com/office/powerpoint/2010/main" val="407906920"/>
+        <p14:creationId xmlns:p14="http://schemas.microsoft.com/office/powerpoint/2010/main" val="4037842081"/>
+      </p:ext>
+    </p:extLst>
+  </p:cSld>
+  <p:clrMapOvr>
+    <a:masterClrMapping/>
+  </p:clrMapOvr>
+</p:sld>
+</file>
+
+<file path=ppt/slides/slide6.xml><?xml version="1.0" encoding="utf-8"?>
+<p:sld xmlns:a="http://schemas.openxmlformats.org/drawingml/2006/main" xmlns:r="http://schemas.openxmlformats.org/officeDocument/2006/relationships" xmlns:p="http://schemas.openxmlformats.org/presentationml/2006/main">
+  <p:cSld>
+    <p:spTree>
+      <p:nvGrpSpPr>
+        <p:cNvPr id="1" name="">
+          <a:extLst>
+            <a:ext uri="{FF2B5EF4-FFF2-40B4-BE49-F238E27FC236}">
+              <a16:creationId xmlns:a16="http://schemas.microsoft.com/office/drawing/2014/main" id="{C164B196-AC5A-81F8-5353-73E52E06C573}"/>
+            </a:ext>
+          </a:extLst>
+        </p:cNvPr>
+        <p:cNvGrpSpPr/>
+        <p:nvPr/>
+      </p:nvGrpSpPr>
+      <p:grpSpPr>
+        <a:xfrm>
+          <a:off x="0" y="0"/>
+          <a:ext cx="0" cy="0"/>
+          <a:chOff x="0" y="0"/>
+          <a:chExt cx="0" cy="0"/>
+        </a:xfrm>
+      </p:grpSpPr>
+      <p:sp>
+        <p:nvSpPr>
+          <p:cNvPr id="4" name="Obdélník 3">
+            <a:extLst>
+              <a:ext uri="{FF2B5EF4-FFF2-40B4-BE49-F238E27FC236}">
+                <a16:creationId xmlns:a16="http://schemas.microsoft.com/office/drawing/2014/main" id="{1BA95904-4BEA-8093-95C7-9EABC3286C8F}"/>
+              </a:ext>
+            </a:extLst>
+          </p:cNvPr>
+          <p:cNvSpPr/>
+          <p:nvPr/>
+        </p:nvSpPr>
+        <p:spPr>
+          <a:xfrm>
+            <a:off x="-39148" y="0"/>
+            <a:ext cx="12231148" cy="6887361"/>
+          </a:xfrm>
+          <a:prstGeom prst="rect">
+            <a:avLst/>
+          </a:prstGeom>
+          <a:blipFill dpi="0" rotWithShape="1">
+            <a:blip r:embed="rId2">
+              <a:alphaModFix amt="87000"/>
+            </a:blip>
+            <a:srcRect/>
+            <a:stretch>
+              <a:fillRect/>
+            </a:stretch>
+          </a:blipFill>
+        </p:spPr>
+        <p:style>
+          <a:lnRef idx="2">
+            <a:schemeClr val="accent1">
+              <a:shade val="50000"/>
+            </a:schemeClr>
+          </a:lnRef>
+          <a:fillRef idx="1">
+            <a:schemeClr val="accent1"/>
+          </a:fillRef>
+          <a:effectRef idx="0">
+            <a:schemeClr val="accent1"/>
+          </a:effectRef>
+          <a:fontRef idx="minor">
+            <a:schemeClr val="lt1"/>
+          </a:fontRef>
+        </p:style>
+        <p:txBody>
+          <a:bodyPr rtlCol="0" anchor="ctr"/>
+          <a:lstStyle/>
+          <a:p>
+            <a:pPr algn="ctr"/>
+            <a:endParaRPr lang="cs-CZ"/>
+          </a:p>
+        </p:txBody>
+      </p:sp>
+      <p:sp>
+        <p:nvSpPr>
+          <p:cNvPr id="2" name="Nadpis 1">
+            <a:extLst>
+              <a:ext uri="{FF2B5EF4-FFF2-40B4-BE49-F238E27FC236}">
+                <a16:creationId xmlns:a16="http://schemas.microsoft.com/office/drawing/2014/main" id="{FB496854-3CD7-0299-D31F-33DEFF0670DE}"/>
+              </a:ext>
+            </a:extLst>
+          </p:cNvPr>
+          <p:cNvSpPr>
+            <a:spLocks noGrp="1"/>
+          </p:cNvSpPr>
+          <p:nvPr>
+            <p:ph type="ctrTitle"/>
+          </p:nvPr>
+        </p:nvSpPr>
+        <p:spPr>
+          <a:xfrm>
+            <a:off x="1524000" y="1122363"/>
+            <a:ext cx="9144000" cy="947069"/>
+          </a:xfrm>
+        </p:spPr>
+        <p:txBody>
+          <a:bodyPr/>
+          <a:lstStyle/>
+          <a:p>
+            <a:r>
+              <a:rPr lang="cs-CZ" dirty="0">
+                <a:solidFill>
+                  <a:schemeClr val="bg1"/>
+                </a:solidFill>
+              </a:rPr>
+              <a:t>Union-</a:t>
+            </a:r>
+            <a:r>
+              <a:rPr lang="cs-CZ" dirty="0" err="1">
+                <a:solidFill>
+                  <a:schemeClr val="bg1"/>
+                </a:solidFill>
+              </a:rPr>
+              <a:t>Find</a:t>
+            </a:r>
+            <a:r>
+              <a:rPr lang="cs-CZ" dirty="0">
+                <a:solidFill>
+                  <a:schemeClr val="bg1"/>
+                </a:solidFill>
+              </a:rPr>
+              <a:t> Algoritmus v poli</a:t>
+            </a:r>
+          </a:p>
+        </p:txBody>
+      </p:sp>
+      <p:sp>
+        <p:nvSpPr>
+          <p:cNvPr id="3" name="Podnadpis 2">
+            <a:extLst>
+              <a:ext uri="{FF2B5EF4-FFF2-40B4-BE49-F238E27FC236}">
+                <a16:creationId xmlns:a16="http://schemas.microsoft.com/office/drawing/2014/main" id="{4398BFCA-C87C-DAFB-07CF-321FA0C08F64}"/>
+              </a:ext>
+            </a:extLst>
+          </p:cNvPr>
+          <p:cNvSpPr>
+            <a:spLocks noGrp="1"/>
+          </p:cNvSpPr>
+          <p:nvPr>
+            <p:ph type="subTitle" idx="1"/>
+          </p:nvPr>
+        </p:nvSpPr>
+        <p:spPr>
+          <a:xfrm>
+            <a:off x="1524000" y="2227039"/>
+            <a:ext cx="9144000" cy="4109593"/>
+          </a:xfrm>
+        </p:spPr>
+        <p:txBody>
+          <a:bodyPr>
+            <a:normAutofit/>
+          </a:bodyPr>
+          <a:lstStyle/>
+          <a:p>
+            <a:pPr algn="l"/>
+            <a:r>
+              <a:rPr lang="cs-CZ" dirty="0">
+                <a:solidFill>
+                  <a:schemeClr val="bg1"/>
+                </a:solidFill>
+              </a:rPr>
+              <a:t>FIND  O(1)</a:t>
+            </a:r>
+          </a:p>
+          <a:p>
+            <a:pPr marL="457200" indent="-457200" algn="l">
+              <a:buFont typeface="+mj-lt"/>
+              <a:buAutoNum type="arabicPeriod"/>
+            </a:pPr>
+            <a:r>
+              <a:rPr lang="cs-CZ" dirty="0">
+                <a:solidFill>
+                  <a:schemeClr val="bg1"/>
+                </a:solidFill>
+              </a:rPr>
+              <a:t>Odpovíme ANO právě tehdy, když K(u) = K(v)</a:t>
+            </a:r>
+          </a:p>
+          <a:p>
+            <a:pPr algn="l"/>
+            <a:r>
+              <a:rPr lang="cs-CZ" dirty="0">
+                <a:solidFill>
+                  <a:schemeClr val="bg1"/>
+                </a:solidFill>
+              </a:rPr>
+              <a:t>UNION  O(n)</a:t>
+            </a:r>
+          </a:p>
+          <a:p>
+            <a:pPr marL="457200" indent="-457200" algn="l">
+              <a:buFont typeface="+mj-lt"/>
+              <a:buAutoNum type="arabicPeriod"/>
+            </a:pPr>
+            <a:r>
+              <a:rPr lang="cs-CZ" dirty="0">
+                <a:solidFill>
+                  <a:schemeClr val="bg1"/>
+                </a:solidFill>
+              </a:rPr>
+              <a:t>Pro všechny vrcholy x:</a:t>
+            </a:r>
+          </a:p>
+          <a:p>
+            <a:pPr marL="457200" indent="-457200" algn="l">
+              <a:buFont typeface="+mj-lt"/>
+              <a:buAutoNum type="arabicPeriod"/>
+            </a:pPr>
+            <a:r>
+              <a:rPr lang="cs-CZ" dirty="0">
+                <a:solidFill>
+                  <a:schemeClr val="bg1"/>
+                </a:solidFill>
+              </a:rPr>
+              <a:t>      Pokud K(x) = K(u):</a:t>
+            </a:r>
+          </a:p>
+          <a:p>
+            <a:pPr marL="457200" indent="-457200" algn="l">
+              <a:buFont typeface="+mj-lt"/>
+              <a:buAutoNum type="arabicPeriod"/>
+            </a:pPr>
+            <a:r>
+              <a:rPr lang="cs-CZ" dirty="0">
+                <a:solidFill>
+                  <a:schemeClr val="bg1"/>
+                </a:solidFill>
+              </a:rPr>
+              <a:t>            K(x) </a:t>
+            </a:r>
+            <a:r>
+              <a:rPr lang="cs-CZ" dirty="0">
+                <a:solidFill>
+                  <a:schemeClr val="bg1"/>
+                </a:solidFill>
+                <a:sym typeface="Wingdings" panose="05000000000000000000" pitchFamily="2" charset="2"/>
+              </a:rPr>
+              <a:t> K(v)</a:t>
+            </a:r>
+          </a:p>
+          <a:p>
+            <a:pPr algn="l"/>
+            <a:r>
+              <a:rPr lang="cs-CZ" dirty="0">
+                <a:solidFill>
+                  <a:schemeClr val="bg1"/>
+                </a:solidFill>
+                <a:sym typeface="Wingdings" panose="05000000000000000000" pitchFamily="2" charset="2"/>
+              </a:rPr>
+              <a:t>Celý algoritmus O(m log n + n^2)</a:t>
+            </a:r>
+            <a:endParaRPr lang="cs-CZ" dirty="0">
+              <a:solidFill>
+                <a:schemeClr val="bg1"/>
+              </a:solidFill>
+            </a:endParaRPr>
+          </a:p>
+        </p:txBody>
+      </p:sp>
+    </p:spTree>
+    <p:extLst>
+      <p:ext uri="{BB962C8B-B14F-4D97-AF65-F5344CB8AC3E}">
+        <p14:creationId xmlns:p14="http://schemas.microsoft.com/office/powerpoint/2010/main" val="3772684371"/>
+      </p:ext>
+    </p:extLst>
+  </p:cSld>
+  <p:clrMapOvr>
+    <a:masterClrMapping/>
+  </p:clrMapOvr>
+</p:sld>
+</file>
+
+<file path=ppt/slides/slide7.xml><?xml version="1.0" encoding="utf-8"?>
+<p:sld xmlns:a="http://schemas.openxmlformats.org/drawingml/2006/main" xmlns:r="http://schemas.openxmlformats.org/officeDocument/2006/relationships" xmlns:p="http://schemas.openxmlformats.org/presentationml/2006/main">
+  <p:cSld>
+    <p:spTree>
+      <p:nvGrpSpPr>
+        <p:cNvPr id="1" name="">
+          <a:extLst>
+            <a:ext uri="{FF2B5EF4-FFF2-40B4-BE49-F238E27FC236}">
+              <a16:creationId xmlns:a16="http://schemas.microsoft.com/office/drawing/2014/main" id="{74BB6B13-9008-AD18-59CD-EA481ABF23E7}"/>
+            </a:ext>
+          </a:extLst>
+        </p:cNvPr>
+        <p:cNvGrpSpPr/>
+        <p:nvPr/>
+      </p:nvGrpSpPr>
+      <p:grpSpPr>
+        <a:xfrm>
+          <a:off x="0" y="0"/>
+          <a:ext cx="0" cy="0"/>
+          <a:chOff x="0" y="0"/>
+          <a:chExt cx="0" cy="0"/>
+        </a:xfrm>
+      </p:grpSpPr>
+      <p:sp>
+        <p:nvSpPr>
+          <p:cNvPr id="4" name="Obdélník 3">
+            <a:extLst>
+              <a:ext uri="{FF2B5EF4-FFF2-40B4-BE49-F238E27FC236}">
+                <a16:creationId xmlns:a16="http://schemas.microsoft.com/office/drawing/2014/main" id="{FE4C3AC7-A064-3027-4D6C-9D2B3911848A}"/>
+              </a:ext>
+            </a:extLst>
+          </p:cNvPr>
+          <p:cNvSpPr/>
+          <p:nvPr/>
+        </p:nvSpPr>
+        <p:spPr>
+          <a:xfrm>
+            <a:off x="-39148" y="0"/>
+            <a:ext cx="12231148" cy="6887361"/>
+          </a:xfrm>
+          <a:prstGeom prst="rect">
+            <a:avLst/>
+          </a:prstGeom>
+          <a:blipFill dpi="0" rotWithShape="1">
+            <a:blip r:embed="rId2">
+              <a:alphaModFix amt="87000"/>
+            </a:blip>
+            <a:srcRect/>
+            <a:stretch>
+              <a:fillRect/>
+            </a:stretch>
+          </a:blipFill>
+        </p:spPr>
+        <p:style>
+          <a:lnRef idx="2">
+            <a:schemeClr val="accent1">
+              <a:shade val="50000"/>
+            </a:schemeClr>
+          </a:lnRef>
+          <a:fillRef idx="1">
+            <a:schemeClr val="accent1"/>
+          </a:fillRef>
+          <a:effectRef idx="0">
+            <a:schemeClr val="accent1"/>
+          </a:effectRef>
+          <a:fontRef idx="minor">
+            <a:schemeClr val="lt1"/>
+          </a:fontRef>
+        </p:style>
+        <p:txBody>
+          <a:bodyPr rtlCol="0" anchor="ctr"/>
+          <a:lstStyle/>
+          <a:p>
+            <a:pPr algn="ctr"/>
+            <a:endParaRPr lang="cs-CZ"/>
+          </a:p>
+        </p:txBody>
+      </p:sp>
+      <p:sp>
+        <p:nvSpPr>
+          <p:cNvPr id="2" name="Nadpis 1">
+            <a:extLst>
+              <a:ext uri="{FF2B5EF4-FFF2-40B4-BE49-F238E27FC236}">
+                <a16:creationId xmlns:a16="http://schemas.microsoft.com/office/drawing/2014/main" id="{AEBB060E-A25E-F8DE-873B-AAB389CE431A}"/>
+              </a:ext>
+            </a:extLst>
+          </p:cNvPr>
+          <p:cNvSpPr>
+            <a:spLocks noGrp="1"/>
+          </p:cNvSpPr>
+          <p:nvPr>
+            <p:ph type="ctrTitle"/>
+          </p:nvPr>
+        </p:nvSpPr>
+        <p:spPr>
+          <a:xfrm>
+            <a:off x="1524000" y="1122363"/>
+            <a:ext cx="9144000" cy="947069"/>
+          </a:xfrm>
+        </p:spPr>
+        <p:txBody>
+          <a:bodyPr/>
+          <a:lstStyle/>
+          <a:p>
+            <a:r>
+              <a:rPr lang="cs-CZ" dirty="0">
+                <a:solidFill>
+                  <a:schemeClr val="bg1"/>
+                </a:solidFill>
+              </a:rPr>
+              <a:t>Union-</a:t>
+            </a:r>
+            <a:r>
+              <a:rPr lang="cs-CZ" dirty="0" err="1">
+                <a:solidFill>
+                  <a:schemeClr val="bg1"/>
+                </a:solidFill>
+              </a:rPr>
+              <a:t>Find</a:t>
+            </a:r>
+            <a:r>
+              <a:rPr lang="cs-CZ" dirty="0">
+                <a:solidFill>
+                  <a:schemeClr val="bg1"/>
+                </a:solidFill>
+              </a:rPr>
+              <a:t> s keříky  1</a:t>
+            </a:r>
+          </a:p>
+        </p:txBody>
+      </p:sp>
+      <mc:AlternateContent xmlns:mc="http://schemas.openxmlformats.org/markup-compatibility/2006" xmlns:a14="http://schemas.microsoft.com/office/drawing/2010/main">
+        <mc:Choice Requires="a14">
+          <p:sp>
+            <p:nvSpPr>
+              <p:cNvPr id="3" name="Podnadpis 2">
+                <a:extLst>
+                  <a:ext uri="{FF2B5EF4-FFF2-40B4-BE49-F238E27FC236}">
+                    <a16:creationId xmlns:a16="http://schemas.microsoft.com/office/drawing/2014/main" id="{9F2072F0-1C58-73CA-0067-D36C65931F6E}"/>
+                  </a:ext>
+                </a:extLst>
+              </p:cNvPr>
+              <p:cNvSpPr>
+                <a:spLocks noGrp="1"/>
+              </p:cNvSpPr>
+              <p:nvPr>
+                <p:ph type="subTitle" idx="1"/>
+              </p:nvPr>
+            </p:nvSpPr>
+            <p:spPr>
+              <a:xfrm>
+                <a:off x="1524000" y="2227039"/>
+                <a:ext cx="9144000" cy="4462519"/>
+              </a:xfrm>
+            </p:spPr>
+            <p:txBody>
+              <a:bodyPr>
+                <a:normAutofit lnSpcReduction="10000"/>
+              </a:bodyPr>
+              <a:lstStyle/>
+              <a:p>
+                <a:pPr algn="l"/>
+                <a:r>
+                  <a:rPr lang="cs-CZ" dirty="0">
+                    <a:solidFill>
+                      <a:schemeClr val="bg1"/>
+                    </a:solidFill>
+                  </a:rPr>
+                  <a:t>Komponenty pole T budeme reprezentovat stromem orientovaným ke kořeni.</a:t>
+                </a:r>
+              </a:p>
+              <a:p>
+                <a:pPr algn="l"/>
+                <a:r>
+                  <a:rPr lang="cs-CZ" dirty="0">
+                    <a:solidFill>
+                      <a:schemeClr val="bg1"/>
+                    </a:solidFill>
+                  </a:rPr>
+                  <a:t>Každý vrchol v si bude pamatovat svého otce P(v), případně speciální hodnotu ∅, pokud je kořenem</a:t>
+                </a:r>
+              </a:p>
+              <a:p>
+                <a:pPr algn="l"/>
+                <a:r>
+                  <a:rPr lang="cs-CZ" dirty="0" err="1">
+                    <a:solidFill>
+                      <a:schemeClr val="bg1"/>
+                    </a:solidFill>
+                  </a:rPr>
+                  <a:t>Find</a:t>
+                </a:r>
+                <a:r>
+                  <a:rPr lang="cs-CZ" dirty="0">
+                    <a:solidFill>
+                      <a:schemeClr val="bg1"/>
+                    </a:solidFill>
+                  </a:rPr>
+                  <a:t> z každého vrcholu vystopuje kořen keříku a porovná je:</a:t>
+                </a:r>
+              </a:p>
+              <a:p>
+                <a:pPr algn="l"/>
+                <a:r>
+                  <a:rPr lang="cs-CZ" dirty="0">
+                    <a:solidFill>
+                      <a:schemeClr val="bg1"/>
+                    </a:solidFill>
+                  </a:rPr>
+                  <a:t>KOŘEN(x)</a:t>
+                </a:r>
+              </a:p>
+              <a:p>
+                <a:pPr marL="457200" indent="-457200" algn="l">
+                  <a:buFont typeface="+mj-lt"/>
+                  <a:buAutoNum type="arabicPeriod"/>
+                </a:pPr>
+                <a:r>
+                  <a:rPr lang="cs-CZ" dirty="0">
+                    <a:solidFill>
+                      <a:schemeClr val="bg1"/>
+                    </a:solidFill>
+                  </a:rPr>
+                  <a:t>Pokud P(x) </a:t>
+                </a:r>
+                <a14:m>
+                  <m:oMath xmlns:m="http://schemas.openxmlformats.org/officeDocument/2006/math">
+                    <m:r>
+                      <a:rPr lang="cs-CZ" i="1" smtClean="0">
+                        <a:solidFill>
+                          <a:schemeClr val="bg1"/>
+                        </a:solidFill>
+                        <a:latin typeface="Cambria Math" panose="02040503050406030204" pitchFamily="18" charset="0"/>
+                        <a:ea typeface="Cambria Math" panose="02040503050406030204" pitchFamily="18" charset="0"/>
+                      </a:rPr>
+                      <m:t>≠</m:t>
+                    </m:r>
+                  </m:oMath>
+                </a14:m>
+                <a:r>
+                  <a:rPr lang="cs-CZ" dirty="0">
+                    <a:solidFill>
+                      <a:schemeClr val="bg1"/>
+                    </a:solidFill>
+                  </a:rPr>
+                  <a:t> ∅:</a:t>
+                </a:r>
+              </a:p>
+              <a:p>
+                <a:pPr marL="457200" indent="-457200" algn="l">
+                  <a:buFont typeface="+mj-lt"/>
+                  <a:buAutoNum type="arabicPeriod"/>
+                </a:pPr>
+                <a:r>
+                  <a:rPr lang="cs-CZ" dirty="0">
+                    <a:solidFill>
+                      <a:schemeClr val="bg1"/>
+                    </a:solidFill>
+                  </a:rPr>
+                  <a:t>     x </a:t>
+                </a:r>
+                <a:r>
+                  <a:rPr lang="cs-CZ" dirty="0">
+                    <a:solidFill>
+                      <a:schemeClr val="bg1"/>
+                    </a:solidFill>
+                    <a:sym typeface="Wingdings" panose="05000000000000000000" pitchFamily="2" charset="2"/>
+                  </a:rPr>
+                  <a:t> P(x)</a:t>
+                </a:r>
+              </a:p>
+              <a:p>
+                <a:pPr marL="457200" indent="-457200" algn="l">
+                  <a:buFont typeface="+mj-lt"/>
+                  <a:buAutoNum type="arabicPeriod"/>
+                </a:pPr>
+                <a:r>
+                  <a:rPr lang="cs-CZ" dirty="0">
+                    <a:solidFill>
+                      <a:schemeClr val="bg1"/>
+                    </a:solidFill>
+                    <a:sym typeface="Wingdings" panose="05000000000000000000" pitchFamily="2" charset="2"/>
+                  </a:rPr>
+                  <a:t>Vrátíme kořen x</a:t>
+                </a:r>
+              </a:p>
+              <a:p>
+                <a:pPr algn="l"/>
+                <a:r>
+                  <a:rPr lang="cs-CZ" dirty="0">
+                    <a:solidFill>
+                      <a:schemeClr val="bg1"/>
+                    </a:solidFill>
+                    <a:sym typeface="Wingdings" panose="05000000000000000000" pitchFamily="2" charset="2"/>
+                  </a:rPr>
+                  <a:t>FIND</a:t>
+                </a:r>
+              </a:p>
+              <a:p>
+                <a:pPr marL="457200" indent="-457200" algn="l">
+                  <a:buAutoNum type="arabicPeriod"/>
+                </a:pPr>
+                <a:r>
+                  <a:rPr lang="cs-CZ" dirty="0">
+                    <a:solidFill>
+                      <a:schemeClr val="bg1"/>
+                    </a:solidFill>
+                    <a:sym typeface="Wingdings" panose="05000000000000000000" pitchFamily="2" charset="2"/>
+                  </a:rPr>
+                  <a:t>Vrátíme ANO právě tehdy, když KOŘEN(u) = KOŘEN(v)</a:t>
+                </a:r>
+                <a:endParaRPr lang="cs-CZ" dirty="0">
+                  <a:solidFill>
+                    <a:schemeClr val="bg1"/>
+                  </a:solidFill>
+                </a:endParaRPr>
+              </a:p>
+              <a:p>
+                <a:pPr algn="l"/>
+                <a:endParaRPr lang="cs-CZ" dirty="0">
+                  <a:solidFill>
+                    <a:schemeClr val="bg1"/>
+                  </a:solidFill>
+                </a:endParaRPr>
+              </a:p>
+            </p:txBody>
+          </p:sp>
+        </mc:Choice>
+        <mc:Fallback xmlns="">
+          <p:sp>
+            <p:nvSpPr>
+              <p:cNvPr id="3" name="Podnadpis 2">
+                <a:extLst>
+                  <a:ext uri="{FF2B5EF4-FFF2-40B4-BE49-F238E27FC236}">
+                    <a16:creationId xmlns:a16="http://schemas.microsoft.com/office/drawing/2014/main" id="{9F2072F0-1C58-73CA-0067-D36C65931F6E}"/>
+                  </a:ext>
+                </a:extLst>
+              </p:cNvPr>
+              <p:cNvSpPr>
+                <a:spLocks noGrp="1" noRot="1" noChangeAspect="1" noMove="1" noResize="1" noEditPoints="1" noAdjustHandles="1" noChangeArrowheads="1" noChangeShapeType="1" noTextEdit="1"/>
+              </p:cNvSpPr>
+              <p:nvPr>
+                <p:ph type="subTitle" idx="1"/>
+              </p:nvPr>
+            </p:nvSpPr>
+            <p:spPr>
+              <a:xfrm>
+                <a:off x="1524000" y="2227039"/>
+                <a:ext cx="9144000" cy="4462519"/>
+              </a:xfrm>
+              <a:blipFill>
+                <a:blip r:embed="rId3"/>
+                <a:stretch>
+                  <a:fillRect l="-1067" t="-2596" b="-410"/>
+                </a:stretch>
+              </a:blipFill>
+            </p:spPr>
+            <p:txBody>
+              <a:bodyPr/>
+              <a:lstStyle/>
+              <a:p>
+                <a:r>
+                  <a:rPr lang="cs-CZ">
+                    <a:noFill/>
+                  </a:rPr>
+                  <a:t> </a:t>
+                </a:r>
+              </a:p>
+            </p:txBody>
+          </p:sp>
+        </mc:Fallback>
+      </mc:AlternateContent>
+    </p:spTree>
+    <p:extLst>
+      <p:ext uri="{BB962C8B-B14F-4D97-AF65-F5344CB8AC3E}">
+        <p14:creationId xmlns:p14="http://schemas.microsoft.com/office/powerpoint/2010/main" val="3317330405"/>
+      </p:ext>
+    </p:extLst>
+  </p:cSld>
+  <p:clrMapOvr>
+    <a:masterClrMapping/>
+  </p:clrMapOvr>
+</p:sld>
+</file>
+
+<file path=ppt/slides/slide8.xml><?xml version="1.0" encoding="utf-8"?>
+<p:sld xmlns:a="http://schemas.openxmlformats.org/drawingml/2006/main" xmlns:r="http://schemas.openxmlformats.org/officeDocument/2006/relationships" xmlns:p="http://schemas.openxmlformats.org/presentationml/2006/main">
+  <p:cSld>
+    <p:spTree>
+      <p:nvGrpSpPr>
+        <p:cNvPr id="1" name="">
+          <a:extLst>
+            <a:ext uri="{FF2B5EF4-FFF2-40B4-BE49-F238E27FC236}">
+              <a16:creationId xmlns:a16="http://schemas.microsoft.com/office/drawing/2014/main" id="{5B11FA68-5AB2-4F5B-8B58-8E25B9BA8D2A}"/>
+            </a:ext>
+          </a:extLst>
+        </p:cNvPr>
+        <p:cNvGrpSpPr/>
+        <p:nvPr/>
+      </p:nvGrpSpPr>
+      <p:grpSpPr>
+        <a:xfrm>
+          <a:off x="0" y="0"/>
+          <a:ext cx="0" cy="0"/>
+          <a:chOff x="0" y="0"/>
+          <a:chExt cx="0" cy="0"/>
+        </a:xfrm>
+      </p:grpSpPr>
+      <p:sp>
+        <p:nvSpPr>
+          <p:cNvPr id="4" name="Obdélník 3">
+            <a:extLst>
+              <a:ext uri="{FF2B5EF4-FFF2-40B4-BE49-F238E27FC236}">
+                <a16:creationId xmlns:a16="http://schemas.microsoft.com/office/drawing/2014/main" id="{133528CB-B7F9-1F5D-5213-A79100821420}"/>
+              </a:ext>
+            </a:extLst>
+          </p:cNvPr>
+          <p:cNvSpPr/>
+          <p:nvPr/>
+        </p:nvSpPr>
+        <p:spPr>
+          <a:xfrm>
+            <a:off x="-39148" y="0"/>
+            <a:ext cx="12231148" cy="6887361"/>
+          </a:xfrm>
+          <a:prstGeom prst="rect">
+            <a:avLst/>
+          </a:prstGeom>
+          <a:blipFill dpi="0" rotWithShape="1">
+            <a:blip r:embed="rId2">
+              <a:alphaModFix amt="87000"/>
+            </a:blip>
+            <a:srcRect/>
+            <a:stretch>
+              <a:fillRect/>
+            </a:stretch>
+          </a:blipFill>
+        </p:spPr>
+        <p:style>
+          <a:lnRef idx="2">
+            <a:schemeClr val="accent1">
+              <a:shade val="50000"/>
+            </a:schemeClr>
+          </a:lnRef>
+          <a:fillRef idx="1">
+            <a:schemeClr val="accent1"/>
+          </a:fillRef>
+          <a:effectRef idx="0">
+            <a:schemeClr val="accent1"/>
+          </a:effectRef>
+          <a:fontRef idx="minor">
+            <a:schemeClr val="lt1"/>
+          </a:fontRef>
+        </p:style>
+        <p:txBody>
+          <a:bodyPr rtlCol="0" anchor="ctr"/>
+          <a:lstStyle/>
+          <a:p>
+            <a:pPr algn="ctr"/>
+            <a:endParaRPr lang="cs-CZ"/>
+          </a:p>
+        </p:txBody>
+      </p:sp>
+      <p:sp>
+        <p:nvSpPr>
+          <p:cNvPr id="2" name="Nadpis 1">
+            <a:extLst>
+              <a:ext uri="{FF2B5EF4-FFF2-40B4-BE49-F238E27FC236}">
+                <a16:creationId xmlns:a16="http://schemas.microsoft.com/office/drawing/2014/main" id="{F6038861-C3D9-CF1A-1B88-5229A2D47971}"/>
+              </a:ext>
+            </a:extLst>
+          </p:cNvPr>
+          <p:cNvSpPr>
+            <a:spLocks noGrp="1"/>
+          </p:cNvSpPr>
+          <p:nvPr>
+            <p:ph type="ctrTitle"/>
+          </p:nvPr>
+        </p:nvSpPr>
+        <p:spPr>
+          <a:xfrm>
+            <a:off x="1524000" y="1122363"/>
+            <a:ext cx="9144000" cy="947069"/>
+          </a:xfrm>
+        </p:spPr>
+        <p:txBody>
+          <a:bodyPr/>
+          <a:lstStyle/>
+          <a:p>
+            <a:r>
+              <a:rPr lang="cs-CZ" dirty="0">
+                <a:solidFill>
+                  <a:schemeClr val="bg1"/>
+                </a:solidFill>
+              </a:rPr>
+              <a:t>Union-</a:t>
+            </a:r>
+            <a:r>
+              <a:rPr lang="cs-CZ" dirty="0" err="1">
+                <a:solidFill>
+                  <a:schemeClr val="bg1"/>
+                </a:solidFill>
+              </a:rPr>
+              <a:t>Find</a:t>
+            </a:r>
+            <a:r>
+              <a:rPr lang="cs-CZ" dirty="0">
+                <a:solidFill>
+                  <a:schemeClr val="bg1"/>
+                </a:solidFill>
+              </a:rPr>
+              <a:t> s keříky  2</a:t>
+            </a:r>
+          </a:p>
+        </p:txBody>
+      </p:sp>
+      <p:sp>
+        <p:nvSpPr>
+          <p:cNvPr id="3" name="Podnadpis 2">
+            <a:extLst>
+              <a:ext uri="{FF2B5EF4-FFF2-40B4-BE49-F238E27FC236}">
+                <a16:creationId xmlns:a16="http://schemas.microsoft.com/office/drawing/2014/main" id="{2AF59273-CAD3-3898-527A-3A6BFA98CCCD}"/>
+              </a:ext>
+            </a:extLst>
+          </p:cNvPr>
+          <p:cNvSpPr>
+            <a:spLocks noGrp="1"/>
+          </p:cNvSpPr>
+          <p:nvPr>
+            <p:ph type="subTitle" idx="1"/>
+          </p:nvPr>
+        </p:nvSpPr>
+        <p:spPr>
+          <a:xfrm>
+            <a:off x="336884" y="1922239"/>
+            <a:ext cx="4908884" cy="4462519"/>
+          </a:xfrm>
+        </p:spPr>
+        <p:txBody>
+          <a:bodyPr>
+            <a:normAutofit/>
+          </a:bodyPr>
+          <a:lstStyle/>
+          <a:p>
+            <a:pPr algn="l"/>
+            <a:r>
+              <a:rPr lang="cs-CZ" dirty="0">
+                <a:solidFill>
+                  <a:schemeClr val="bg1"/>
+                </a:solidFill>
+              </a:rPr>
+              <a:t>Union mezi keříky natáhne novou hranu</a:t>
+            </a:r>
+          </a:p>
+          <a:p>
+            <a:pPr algn="l"/>
+            <a:r>
+              <a:rPr lang="cs-CZ" dirty="0">
+                <a:solidFill>
+                  <a:schemeClr val="bg1"/>
+                </a:solidFill>
+              </a:rPr>
+              <a:t>Každému kořeni keříků přidáme hodnotu H(v),  jenž bude říkat, jak je keřík hluboký</a:t>
+            </a:r>
+          </a:p>
+          <a:p>
+            <a:pPr algn="l"/>
+            <a:r>
+              <a:rPr lang="cs-CZ" dirty="0">
+                <a:solidFill>
+                  <a:schemeClr val="bg1"/>
+                </a:solidFill>
+              </a:rPr>
+              <a:t>Při slučování keříků vždy připojíme mělčí keřík k hlubšímu, pokud budou slučované keříky stejné hloubky, zvolíme nový kořen libovolně, a přidáme mu hloubku</a:t>
+            </a:r>
+          </a:p>
+        </p:txBody>
+      </p:sp>
+      <p:sp>
+        <p:nvSpPr>
+          <p:cNvPr id="5" name="TextovéPole 4">
+            <a:extLst>
+              <a:ext uri="{FF2B5EF4-FFF2-40B4-BE49-F238E27FC236}">
+                <a16:creationId xmlns:a16="http://schemas.microsoft.com/office/drawing/2014/main" id="{E6262B23-87B7-B82B-0A49-AD6B087C4C2F}"/>
+              </a:ext>
+            </a:extLst>
+          </p:cNvPr>
+          <p:cNvSpPr txBox="1"/>
+          <p:nvPr/>
+        </p:nvSpPr>
+        <p:spPr>
+          <a:xfrm>
+            <a:off x="5372100" y="1931129"/>
+            <a:ext cx="6172200" cy="4154984"/>
+          </a:xfrm>
+          <a:prstGeom prst="rect">
+            <a:avLst/>
+          </a:prstGeom>
+          <a:noFill/>
+        </p:spPr>
+        <p:txBody>
+          <a:bodyPr wrap="square" rtlCol="0">
+            <a:spAutoFit/>
+          </a:bodyPr>
+          <a:lstStyle/>
+          <a:p>
+            <a:r>
+              <a:rPr lang="cs-CZ" sz="2400" dirty="0">
+                <a:solidFill>
+                  <a:schemeClr val="bg1"/>
+                </a:solidFill>
+              </a:rPr>
+              <a:t>UNION(</a:t>
+            </a:r>
+            <a:r>
+              <a:rPr lang="cs-CZ" sz="2400" dirty="0" err="1">
+                <a:solidFill>
+                  <a:schemeClr val="bg1"/>
+                </a:solidFill>
+              </a:rPr>
+              <a:t>u,v</a:t>
+            </a:r>
+            <a:r>
+              <a:rPr lang="cs-CZ" sz="2400" dirty="0">
+                <a:solidFill>
+                  <a:schemeClr val="bg1"/>
+                </a:solidFill>
+              </a:rPr>
+              <a:t>):</a:t>
+            </a:r>
+          </a:p>
+          <a:p>
+            <a:pPr marL="457200" indent="-457200">
+              <a:buFont typeface="+mj-lt"/>
+              <a:buAutoNum type="arabicPeriod"/>
+            </a:pPr>
+            <a:r>
+              <a:rPr lang="cs-CZ" sz="2400" dirty="0">
+                <a:solidFill>
+                  <a:schemeClr val="bg1"/>
+                </a:solidFill>
+              </a:rPr>
+              <a:t>a </a:t>
+            </a:r>
+            <a:r>
+              <a:rPr lang="cs-CZ" sz="2400" dirty="0">
+                <a:solidFill>
+                  <a:schemeClr val="bg1"/>
+                </a:solidFill>
+                <a:sym typeface="Wingdings" panose="05000000000000000000" pitchFamily="2" charset="2"/>
+              </a:rPr>
+              <a:t> KOŘEN(u), b  KOŘEN(v)</a:t>
+            </a:r>
+          </a:p>
+          <a:p>
+            <a:pPr marL="457200" indent="-457200">
+              <a:buFont typeface="+mj-lt"/>
+              <a:buAutoNum type="arabicPeriod"/>
+            </a:pPr>
+            <a:r>
+              <a:rPr lang="cs-CZ" sz="2400" dirty="0">
+                <a:solidFill>
+                  <a:schemeClr val="bg1"/>
+                </a:solidFill>
+                <a:sym typeface="Wingdings" panose="05000000000000000000" pitchFamily="2" charset="2"/>
+              </a:rPr>
+              <a:t>Je-li a = b, ihned skončíme.</a:t>
+            </a:r>
+          </a:p>
+          <a:p>
+            <a:pPr marL="457200" indent="-457200">
+              <a:buFont typeface="+mj-lt"/>
+              <a:buAutoNum type="arabicPeriod"/>
+            </a:pPr>
+            <a:r>
+              <a:rPr lang="cs-CZ" sz="2400" dirty="0">
+                <a:solidFill>
+                  <a:schemeClr val="bg1"/>
+                </a:solidFill>
+                <a:sym typeface="Wingdings" panose="05000000000000000000" pitchFamily="2" charset="2"/>
+              </a:rPr>
+              <a:t>Pokud H(a) &lt; H(b):</a:t>
+            </a:r>
+          </a:p>
+          <a:p>
+            <a:pPr marL="457200" indent="-457200">
+              <a:buFont typeface="+mj-lt"/>
+              <a:buAutoNum type="arabicPeriod"/>
+            </a:pPr>
+            <a:r>
+              <a:rPr lang="cs-CZ" sz="2400" dirty="0">
+                <a:solidFill>
+                  <a:schemeClr val="bg1"/>
+                </a:solidFill>
+                <a:sym typeface="Wingdings" panose="05000000000000000000" pitchFamily="2" charset="2"/>
+              </a:rPr>
+              <a:t>     P(a)  b</a:t>
+            </a:r>
+          </a:p>
+          <a:p>
+            <a:pPr marL="457200" indent="-457200">
+              <a:buFont typeface="+mj-lt"/>
+              <a:buAutoNum type="arabicPeriod"/>
+            </a:pPr>
+            <a:r>
+              <a:rPr lang="cs-CZ" sz="2400" dirty="0">
+                <a:solidFill>
+                  <a:schemeClr val="bg1"/>
+                </a:solidFill>
+                <a:sym typeface="Wingdings" panose="05000000000000000000" pitchFamily="2" charset="2"/>
+              </a:rPr>
+              <a:t>Pokud H(a) &gt; H(b):</a:t>
+            </a:r>
+          </a:p>
+          <a:p>
+            <a:pPr marL="457200" indent="-457200">
+              <a:buFont typeface="+mj-lt"/>
+              <a:buAutoNum type="arabicPeriod"/>
+            </a:pPr>
+            <a:r>
+              <a:rPr lang="cs-CZ" sz="2400" dirty="0">
+                <a:solidFill>
+                  <a:schemeClr val="bg1"/>
+                </a:solidFill>
+                <a:sym typeface="Wingdings" panose="05000000000000000000" pitchFamily="2" charset="2"/>
+              </a:rPr>
+              <a:t>     P(b)  a</a:t>
+            </a:r>
+          </a:p>
+          <a:p>
+            <a:pPr marL="457200" indent="-457200">
+              <a:buFont typeface="+mj-lt"/>
+              <a:buAutoNum type="arabicPeriod"/>
+            </a:pPr>
+            <a:r>
+              <a:rPr lang="cs-CZ" sz="2400" dirty="0">
+                <a:solidFill>
+                  <a:schemeClr val="bg1"/>
+                </a:solidFill>
+                <a:sym typeface="Wingdings" panose="05000000000000000000" pitchFamily="2" charset="2"/>
+              </a:rPr>
+              <a:t>Jinak:</a:t>
+            </a:r>
+          </a:p>
+          <a:p>
+            <a:pPr marL="457200" indent="-457200">
+              <a:buFont typeface="+mj-lt"/>
+              <a:buAutoNum type="arabicPeriod"/>
+            </a:pPr>
+            <a:r>
+              <a:rPr lang="cs-CZ" sz="2400" dirty="0">
+                <a:solidFill>
+                  <a:schemeClr val="bg1"/>
+                </a:solidFill>
+                <a:sym typeface="Wingdings" panose="05000000000000000000" pitchFamily="2" charset="2"/>
+              </a:rPr>
+              <a:t>     P(b)  a</a:t>
+            </a:r>
+          </a:p>
+          <a:p>
+            <a:pPr marL="457200" indent="-457200">
+              <a:buFont typeface="+mj-lt"/>
+              <a:buAutoNum type="arabicPeriod"/>
+            </a:pPr>
+            <a:r>
+              <a:rPr lang="cs-CZ" sz="2400" dirty="0">
+                <a:solidFill>
+                  <a:schemeClr val="bg1"/>
+                </a:solidFill>
+                <a:sym typeface="Wingdings" panose="05000000000000000000" pitchFamily="2" charset="2"/>
+              </a:rPr>
+              <a:t>     H(a)  H(a) + 1</a:t>
+            </a:r>
+          </a:p>
+          <a:p>
+            <a:r>
+              <a:rPr lang="cs-CZ" sz="2400" dirty="0">
+                <a:solidFill>
+                  <a:schemeClr val="bg1"/>
+                </a:solidFill>
+                <a:sym typeface="Wingdings" panose="05000000000000000000" pitchFamily="2" charset="2"/>
+              </a:rPr>
+              <a:t>O(log n)</a:t>
+            </a:r>
+            <a:endParaRPr lang="cs-CZ" sz="2400" dirty="0">
+              <a:solidFill>
+                <a:schemeClr val="bg1"/>
+              </a:solidFill>
+            </a:endParaRPr>
+          </a:p>
+        </p:txBody>
+      </p:sp>
+    </p:spTree>
+    <p:extLst>
+      <p:ext uri="{BB962C8B-B14F-4D97-AF65-F5344CB8AC3E}">
+        <p14:creationId xmlns:p14="http://schemas.microsoft.com/office/powerpoint/2010/main" val="1742021827"/>
+      </p:ext>
+    </p:extLst>
+  </p:cSld>
+  <p:clrMapOvr>
+    <a:masterClrMapping/>
+  </p:clrMapOvr>
+</p:sld>
+</file>
+
+<file path=ppt/slides/slide9.xml><?xml version="1.0" encoding="utf-8"?>
+<p:sld xmlns:a="http://schemas.openxmlformats.org/drawingml/2006/main" xmlns:r="http://schemas.openxmlformats.org/officeDocument/2006/relationships" xmlns:p="http://schemas.openxmlformats.org/presentationml/2006/main">
+  <p:cSld>
+    <p:spTree>
+      <p:nvGrpSpPr>
+        <p:cNvPr id="1" name="">
+          <a:extLst>
+            <a:ext uri="{FF2B5EF4-FFF2-40B4-BE49-F238E27FC236}">
+              <a16:creationId xmlns:a16="http://schemas.microsoft.com/office/drawing/2014/main" id="{D91647D9-1890-3FF1-65DB-E271A761293C}"/>
+            </a:ext>
+          </a:extLst>
+        </p:cNvPr>
+        <p:cNvGrpSpPr/>
+        <p:nvPr/>
+      </p:nvGrpSpPr>
+      <p:grpSpPr>
+        <a:xfrm>
+          <a:off x="0" y="0"/>
+          <a:ext cx="0" cy="0"/>
+          <a:chOff x="0" y="0"/>
+          <a:chExt cx="0" cy="0"/>
+        </a:xfrm>
+      </p:grpSpPr>
+      <p:sp>
+        <p:nvSpPr>
+          <p:cNvPr id="4" name="Obdélník 3">
+            <a:extLst>
+              <a:ext uri="{FF2B5EF4-FFF2-40B4-BE49-F238E27FC236}">
+                <a16:creationId xmlns:a16="http://schemas.microsoft.com/office/drawing/2014/main" id="{0979BFC9-1847-0568-C7B9-2A11B08BD5ED}"/>
+              </a:ext>
+            </a:extLst>
+          </p:cNvPr>
+          <p:cNvSpPr/>
+          <p:nvPr/>
+        </p:nvSpPr>
+        <p:spPr>
+          <a:xfrm>
+            <a:off x="-39148" y="0"/>
+            <a:ext cx="12231148" cy="6887361"/>
+          </a:xfrm>
+          <a:prstGeom prst="rect">
+            <a:avLst/>
+          </a:prstGeom>
+          <a:blipFill dpi="0" rotWithShape="1">
+            <a:blip r:embed="rId2">
+              <a:alphaModFix amt="87000"/>
+            </a:blip>
+            <a:srcRect/>
+            <a:stretch>
+              <a:fillRect/>
+            </a:stretch>
+          </a:blipFill>
+        </p:spPr>
+        <p:style>
+          <a:lnRef idx="2">
+            <a:schemeClr val="accent1">
+              <a:shade val="50000"/>
+            </a:schemeClr>
+          </a:lnRef>
+          <a:fillRef idx="1">
+            <a:schemeClr val="accent1"/>
+          </a:fillRef>
+          <a:effectRef idx="0">
+            <a:schemeClr val="accent1"/>
+          </a:effectRef>
+          <a:fontRef idx="minor">
+            <a:schemeClr val="lt1"/>
+          </a:fontRef>
+        </p:style>
+        <p:txBody>
+          <a:bodyPr rtlCol="0" anchor="ctr"/>
+          <a:lstStyle/>
+          <a:p>
+            <a:pPr algn="ctr"/>
+            <a:endParaRPr lang="cs-CZ"/>
+          </a:p>
+        </p:txBody>
+      </p:sp>
+      <p:sp>
+        <p:nvSpPr>
+          <p:cNvPr id="2" name="Nadpis 1">
+            <a:extLst>
+              <a:ext uri="{FF2B5EF4-FFF2-40B4-BE49-F238E27FC236}">
+                <a16:creationId xmlns:a16="http://schemas.microsoft.com/office/drawing/2014/main" id="{8FB32429-2656-F013-3D83-6ED526656254}"/>
+              </a:ext>
+            </a:extLst>
+          </p:cNvPr>
+          <p:cNvSpPr>
+            <a:spLocks noGrp="1"/>
+          </p:cNvSpPr>
+          <p:nvPr>
+            <p:ph type="ctrTitle"/>
+          </p:nvPr>
+        </p:nvSpPr>
+        <p:spPr>
+          <a:xfrm>
+            <a:off x="1524000" y="1122363"/>
+            <a:ext cx="9144000" cy="947069"/>
+          </a:xfrm>
+        </p:spPr>
+        <p:txBody>
+          <a:bodyPr/>
+          <a:lstStyle/>
+          <a:p>
+            <a:r>
+              <a:rPr lang="cs-CZ" dirty="0">
+                <a:solidFill>
+                  <a:schemeClr val="bg1"/>
+                </a:solidFill>
+              </a:rPr>
+              <a:t>Důkaz</a:t>
+            </a:r>
+          </a:p>
+        </p:txBody>
+      </p:sp>
+      <p:sp>
+        <p:nvSpPr>
+          <p:cNvPr id="3" name="Podnadpis 2">
+            <a:extLst>
+              <a:ext uri="{FF2B5EF4-FFF2-40B4-BE49-F238E27FC236}">
+                <a16:creationId xmlns:a16="http://schemas.microsoft.com/office/drawing/2014/main" id="{D072A054-9D14-3ADC-811D-4E3389AACFDC}"/>
+              </a:ext>
+            </a:extLst>
+          </p:cNvPr>
+          <p:cNvSpPr>
+            <a:spLocks noGrp="1"/>
+          </p:cNvSpPr>
+          <p:nvPr>
+            <p:ph type="subTitle" idx="1"/>
+          </p:nvPr>
+        </p:nvSpPr>
+        <p:spPr>
+          <a:xfrm>
+            <a:off x="1523998" y="2069433"/>
+            <a:ext cx="9144001" cy="4299284"/>
+          </a:xfrm>
+        </p:spPr>
+        <p:txBody>
+          <a:bodyPr>
+            <a:normAutofit fontScale="92500" lnSpcReduction="10000"/>
+          </a:bodyPr>
+          <a:lstStyle/>
+          <a:p>
+            <a:pPr algn="l"/>
+            <a:r>
+              <a:rPr lang="cs-CZ" dirty="0">
+                <a:solidFill>
+                  <a:schemeClr val="bg1"/>
+                </a:solidFill>
+              </a:rPr>
+              <a:t>Na začátku mají všechny keříky hloubku 1</a:t>
+            </a:r>
+          </a:p>
+          <a:p>
+            <a:pPr algn="l"/>
+            <a:r>
+              <a:rPr lang="cs-CZ" dirty="0">
+                <a:solidFill>
+                  <a:schemeClr val="bg1"/>
+                </a:solidFill>
+              </a:rPr>
+              <a:t>Pokud mají keříky hloubky různé, připojením mělčího keříku pod kořen toho hlubšího se hloubka nezmění a počet vrcholů neklesne, takže nerovnost stále platí.</a:t>
+            </a:r>
+          </a:p>
+          <a:p>
+            <a:pPr algn="l"/>
+            <a:r>
+              <a:rPr lang="cs-CZ" dirty="0">
+                <a:solidFill>
+                  <a:schemeClr val="bg1"/>
+                </a:solidFill>
+              </a:rPr>
+              <a:t>Pokud je hloubka keříků stejná, každý z nich má hloubku alespoň 2^h vrcholů, a sloučením vznikne keřík hloubky h + 1 o alespoň 2^(h + 1) vrcholech, nerovnost je tudíž opět splněna</a:t>
+            </a:r>
+          </a:p>
+          <a:p>
+            <a:pPr algn="l"/>
+            <a:r>
+              <a:rPr lang="cs-CZ" dirty="0">
+                <a:solidFill>
+                  <a:schemeClr val="bg1"/>
+                </a:solidFill>
+              </a:rPr>
+              <a:t>Důsledkem tohoto hloubky keříků nepřekročí log n</a:t>
+            </a:r>
+          </a:p>
+          <a:p>
+            <a:pPr algn="l"/>
+            <a:r>
+              <a:rPr lang="cs-CZ" dirty="0">
+                <a:solidFill>
+                  <a:schemeClr val="bg1"/>
+                </a:solidFill>
+              </a:rPr>
+              <a:t>Hledání kořene keříku zabere čas lineární s jeho hloubkou, tedy O(log n). Obě operace datové struktury provedou dvě hledání kořene a O(1) dalších operací.</a:t>
+            </a:r>
+          </a:p>
+          <a:p>
+            <a:pPr algn="l"/>
+            <a:r>
+              <a:rPr lang="cs-CZ" dirty="0" err="1">
+                <a:solidFill>
+                  <a:schemeClr val="bg1"/>
+                </a:solidFill>
+              </a:rPr>
+              <a:t>Kruskalův</a:t>
+            </a:r>
+            <a:r>
+              <a:rPr lang="cs-CZ" dirty="0">
+                <a:solidFill>
+                  <a:schemeClr val="bg1"/>
+                </a:solidFill>
+              </a:rPr>
+              <a:t> algoritmus s keříkovou strukturou pro Union-</a:t>
+            </a:r>
+            <a:r>
+              <a:rPr lang="cs-CZ" dirty="0" err="1">
+                <a:solidFill>
+                  <a:schemeClr val="bg1"/>
+                </a:solidFill>
+              </a:rPr>
+              <a:t>Find</a:t>
+            </a:r>
+            <a:r>
+              <a:rPr lang="cs-CZ" dirty="0">
+                <a:solidFill>
+                  <a:schemeClr val="bg1"/>
+                </a:solidFill>
+              </a:rPr>
+              <a:t> najde minimální kostru v čase O(m log n).</a:t>
+            </a:r>
+          </a:p>
+        </p:txBody>
+      </p:sp>
+    </p:spTree>
+    <p:extLst>
+      <p:ext uri="{BB962C8B-B14F-4D97-AF65-F5344CB8AC3E}">
+        <p14:creationId xmlns:p14="http://schemas.microsoft.com/office/powerpoint/2010/main" val="925349580"/>
       </p:ext>
     </p:extLst>
   </p:cSld>
